--- a/Central_Bus_Management_System_Presentation.pptx
+++ b/Central_Bus_Management_System_Presentation.pptx
@@ -14,6 +14,8 @@
     <p:sldId id="262" r:id="rId13"/>
     <p:sldId id="263" r:id="rId14"/>
     <p:sldId id="264" r:id="rId15"/>
+    <p:sldId id="265" r:id="rId16"/>
+    <p:sldId id="266" r:id="rId17"/>
   </p:sldIdLst>
   <p:sldSz cx="12191695" cy="6858000" type="screen4x3"/>
   <p:notesSz cx="6858000" cy="9144000"/>
@@ -3147,8 +3149,8 @@
         </p:nvSpPr>
         <p:spPr>
           <a:xfrm>
-            <a:off x="731520" y="1097280"/>
-            <a:ext cx="1645920" cy="73152"/>
+            <a:off x="731520" y="914400"/>
+            <a:ext cx="2011680" cy="73152"/>
           </a:xfrm>
           <a:prstGeom prst="rect">
             <a:avLst/>
@@ -3184,14 +3186,68 @@
       </p:sp>
       <p:sp>
         <p:nvSpPr>
-          <p:cNvPr id="4" name="TextBox 3"/>
+          <p:cNvPr id="4" name="Rounded Rectangle 3"/>
+          <p:cNvSpPr/>
+          <p:nvPr/>
+        </p:nvSpPr>
+        <p:spPr>
+          <a:xfrm>
+            <a:off x="731520" y="1188720"/>
+            <a:ext cx="2926080" cy="365760"/>
+          </a:xfrm>
+          <a:prstGeom prst="roundRect">
+            <a:avLst/>
+          </a:prstGeom>
+          <a:solidFill>
+            <a:srgbClr val="1E293B"/>
+          </a:solidFill>
+          <a:ln>
+            <a:solidFill>
+              <a:srgbClr val="4F46E5"/>
+            </a:solidFill>
+          </a:ln>
+        </p:spPr>
+        <p:style>
+          <a:lnRef idx="1">
+            <a:schemeClr val="accent1"/>
+          </a:lnRef>
+          <a:fillRef idx="3">
+            <a:schemeClr val="accent1"/>
+          </a:fillRef>
+          <a:effectRef idx="2">
+            <a:schemeClr val="accent1"/>
+          </a:effectRef>
+          <a:fontRef idx="minor">
+            <a:schemeClr val="lt1"/>
+          </a:fontRef>
+        </p:style>
+        <p:txBody>
+          <a:bodyPr rtlCol="0" anchor="ctr"/>
+          <a:lstStyle/>
+          <a:p>
+            <a:pPr algn="ctr">
+              <a:defRPr sz="950" b="1">
+                <a:solidFill>
+                  <a:srgbClr val="E0E7FF"/>
+                </a:solidFill>
+              </a:defRPr>
+            </a:pPr>
+            <a:r>
+              <a:t>★ OFFICIAL PROJECT PRESENTATION ★</a:t>
+            </a:r>
+          </a:p>
+        </p:txBody>
+      </p:sp>
+      <p:sp>
+        <p:nvSpPr>
+          <p:cNvPr id="5" name="TextBox 4"/>
           <p:cNvSpPr txBox="1"/>
           <p:nvPr/>
         </p:nvSpPr>
         <p:spPr>
           <a:xfrm>
-            <a:off x="731520" y="1371600"/>
-            <a:ext cx="10698480" cy="4114800"/>
+            <a:off x="731520" y="1691640"/>
+            <a:ext cx="10698480" cy="2560320"/>
           </a:xfrm>
           <a:prstGeom prst="rect">
             <a:avLst/>
@@ -3206,22 +3262,22 @@
           <a:p>
             <a:pPr>
               <a:spcAft>
-                <a:spcPts val="800"/>
-              </a:spcAft>
-              <a:defRPr sz="1600" b="1">
-                <a:solidFill>
-                  <a:srgbClr val="E0E7FF"/>
-                </a:solidFill>
-              </a:defRPr>
-            </a:pPr>
-            <a:r>
-              <a:t>CENTRAL BUS DESK</a:t>
-            </a:r>
-          </a:p>
-          <a:p>
-            <a:pPr>
-              <a:spcAft>
-                <a:spcPts val="1200"/>
+                <a:spcPts val="600"/>
+              </a:spcAft>
+              <a:defRPr sz="1800" b="1">
+                <a:solidFill>
+                  <a:srgbClr val="A5B4FC"/>
+                </a:solidFill>
+              </a:defRPr>
+            </a:pPr>
+            <a:r>
+              <a:t>WELCOME TO CENTRAL BUS DESK</a:t>
+            </a:r>
+          </a:p>
+          <a:p>
+            <a:pPr>
+              <a:spcAft>
+                <a:spcPts val="1000"/>
               </a:spcAft>
               <a:defRPr sz="3200" b="1">
                 <a:solidFill>
@@ -3230,36 +3286,33 @@
               </a:defRPr>
             </a:pPr>
             <a:r>
-              <a:t>৯টি কাউন্টার ও রিয়েল-টাইম বাস ফ্লিট ম্যানেজমেন্ট সিস্টেম</a:t>
-            </a:r>
-          </a:p>
-          <a:p>
-            <a:pPr>
-              <a:spcAft>
-                <a:spcPts val="2800"/>
-              </a:spcAft>
-              <a:defRPr sz="1500">
+              <a:t>১০টি কাউন্টার ও রিয়েল-টাইম বাস ফ্লিট ম্যানেজমেন্ট সিস্টেম</a:t>
+            </a:r>
+          </a:p>
+          <a:p>
+            <a:pPr>
+              <a:defRPr sz="1400">
                 <a:solidFill>
                   <a:srgbClr val="94A3B8"/>
                 </a:solidFill>
               </a:defRPr>
             </a:pPr>
             <a:r>
-              <a:t>Super Admin Supervision &amp; Terminal-Wise Counter Sales Dashboard Presentation</a:t>
-            </a:r>
-          </a:p>
-        </p:txBody>
-      </p:sp>
-      <p:sp>
-        <p:nvSpPr>
-          <p:cNvPr id="5" name="Rounded Rectangle 4"/>
+              <a:t>সেন্ট্রাল সুপার অ্যাডমিন মনিটরিং ও টার্মিনাল-ভিত্তিক সেলস ডেস্কের সমন্বিত প্রেজেন্টেশন</a:t>
+            </a:r>
+          </a:p>
+        </p:txBody>
+      </p:sp>
+      <p:sp>
+        <p:nvSpPr>
+          <p:cNvPr id="6" name="Rounded Rectangle 5"/>
           <p:cNvSpPr/>
           <p:nvPr/>
         </p:nvSpPr>
         <p:spPr>
           <a:xfrm>
-            <a:off x="731520" y="4114800"/>
-            <a:ext cx="3383280" cy="1463040"/>
+            <a:off x="731520" y="4297680"/>
+            <a:ext cx="2560320" cy="1645920"/>
           </a:xfrm>
           <a:prstGeom prst="roundRect">
             <a:avLst/>
@@ -3297,14 +3350,14 @@
       </p:sp>
       <p:sp>
         <p:nvSpPr>
-          <p:cNvPr id="6" name="TextBox 5"/>
+          <p:cNvPr id="7" name="TextBox 6"/>
           <p:cNvSpPr txBox="1"/>
           <p:nvPr/>
         </p:nvSpPr>
         <p:spPr>
           <a:xfrm>
-            <a:off x="914400" y="4251960"/>
-            <a:ext cx="3017520" cy="1188720"/>
+            <a:off x="896112" y="4434840"/>
+            <a:ext cx="2231136" cy="1371600"/>
           </a:xfrm>
           <a:prstGeom prst="rect">
             <a:avLst/>
@@ -3328,33 +3381,33 @@
               </a:defRPr>
             </a:pPr>
             <a:r>
-              <a:t>🛡️ SUPER ADMIN PORTAL</a:t>
-            </a:r>
-          </a:p>
-          <a:p>
-            <a:pPr>
-              <a:defRPr sz="1000">
+              <a:t>🛡️ SUPER ADMIN HQ</a:t>
+            </a:r>
+          </a:p>
+          <a:p>
+            <a:pPr>
+              <a:defRPr sz="950">
                 <a:solidFill>
                   <a:srgbClr val="94A3B8"/>
                 </a:solidFill>
               </a:defRPr>
             </a:pPr>
             <a:r>
-              <a:t>সারাদেশের ৯টি কাউন্টারের লাইভ মনিটরিং, ছাড়া বাস ও খালি সিটের তথ্য</a:t>
-            </a:r>
-          </a:p>
-        </p:txBody>
-      </p:sp>
-      <p:sp>
-        <p:nvSpPr>
-          <p:cNvPr id="7" name="Rounded Rectangle 6"/>
+              <a:t>সারাদেশের ১০টি কাউন্টার এক নজরে লাইভ মনিটরিং, ছাড়া বাস ও খালি সিটের সেন্ট্রাল অডিট</a:t>
+            </a:r>
+          </a:p>
+        </p:txBody>
+      </p:sp>
+      <p:sp>
+        <p:nvSpPr>
+          <p:cNvPr id="8" name="Rounded Rectangle 7"/>
           <p:cNvSpPr/>
           <p:nvPr/>
         </p:nvSpPr>
         <p:spPr>
           <a:xfrm>
-            <a:off x="4297680" y="4114800"/>
-            <a:ext cx="3383280" cy="1463040"/>
+            <a:off x="3429000" y="4297680"/>
+            <a:ext cx="2560320" cy="1645920"/>
           </a:xfrm>
           <a:prstGeom prst="roundRect">
             <a:avLst/>
@@ -3392,14 +3445,14 @@
       </p:sp>
       <p:sp>
         <p:nvSpPr>
-          <p:cNvPr id="8" name="TextBox 7"/>
+          <p:cNvPr id="9" name="TextBox 8"/>
           <p:cNvSpPr txBox="1"/>
           <p:nvPr/>
         </p:nvSpPr>
         <p:spPr>
           <a:xfrm>
-            <a:off x="4480560" y="4251960"/>
-            <a:ext cx="3017520" cy="1188720"/>
+            <a:off x="3593592" y="4434840"/>
+            <a:ext cx="2231136" cy="1371600"/>
           </a:xfrm>
           <a:prstGeom prst="rect">
             <a:avLst/>
@@ -3423,33 +3476,33 @@
               </a:defRPr>
             </a:pPr>
             <a:r>
-              <a:t>🎫 9 COUNTER SALES PORTALS</a:t>
-            </a:r>
-          </a:p>
-          <a:p>
-            <a:pPr>
-              <a:defRPr sz="1000">
+              <a:t>🎫 10 COUNTER PORTALS</a:t>
+            </a:r>
+          </a:p>
+          <a:p>
+            <a:pPr>
+              <a:defRPr sz="950">
                 <a:solidFill>
                   <a:srgbClr val="94A3B8"/>
                 </a:solidFill>
               </a:defRPr>
             </a:pPr>
             <a:r>
-              <a:t>প্রতিটি কাউন্টারের জন্য আলাদা লগইন, বাসের শিডিউল ও সিট বুকিং ডেস্ক</a:t>
-            </a:r>
-          </a:p>
-        </p:txBody>
-      </p:sp>
-      <p:sp>
-        <p:nvSpPr>
-          <p:cNvPr id="9" name="Rounded Rectangle 8"/>
+              <a:t>প্রতিটি টার্মিনালের জন্য সম্পূর্ণ আলাদা লগইন, বাসের শিডিউল যোগ/এডিট ও সিট বুকিং</a:t>
+            </a:r>
+          </a:p>
+        </p:txBody>
+      </p:sp>
+      <p:sp>
+        <p:nvSpPr>
+          <p:cNvPr id="10" name="Rounded Rectangle 9"/>
           <p:cNvSpPr/>
           <p:nvPr/>
         </p:nvSpPr>
         <p:spPr>
           <a:xfrm>
-            <a:off x="7863840" y="4114800"/>
-            <a:ext cx="3383280" cy="1463040"/>
+            <a:off x="6126480" y="4297680"/>
+            <a:ext cx="2560320" cy="1645920"/>
           </a:xfrm>
           <a:prstGeom prst="roundRect">
             <a:avLst/>
@@ -3487,14 +3540,14 @@
       </p:sp>
       <p:sp>
         <p:nvSpPr>
-          <p:cNvPr id="10" name="TextBox 9"/>
+          <p:cNvPr id="11" name="TextBox 10"/>
           <p:cNvSpPr txBox="1"/>
           <p:nvPr/>
         </p:nvSpPr>
         <p:spPr>
           <a:xfrm>
-            <a:off x="8046720" y="4251960"/>
-            <a:ext cx="3017520" cy="1188720"/>
+            <a:off x="6291072" y="4434840"/>
+            <a:ext cx="2231136" cy="1371600"/>
           </a:xfrm>
           <a:prstGeom prst="rect">
             <a:avLst/>
@@ -3518,33 +3571,78 @@
               </a:defRPr>
             </a:pPr>
             <a:r>
-              <a:t>💺 REAL-TIME 2x2 SEAT PLAN</a:t>
-            </a:r>
-          </a:p>
-          <a:p>
-            <a:pPr>
-              <a:defRPr sz="1000">
+              <a:t>💺 2x2 SEAT ENGINE</a:t>
+            </a:r>
+          </a:p>
+          <a:p>
+            <a:pPr>
+              <a:defRPr sz="950">
                 <a:solidFill>
                   <a:srgbClr val="94A3B8"/>
                 </a:solidFill>
               </a:defRPr>
             </a:pPr>
             <a:r>
-              <a:t>বাসের অভ্যন্তরীণ আসন বিন্যাস, কনফার্মেশন ও স্বয়ংক্রিয় প্রিন্ট রিসিট</a:t>
-            </a:r>
-          </a:p>
-        </p:txBody>
-      </p:sp>
-      <p:sp>
-        <p:nvSpPr>
-          <p:cNvPr id="11" name="TextBox 10"/>
+              <a:t>বাস্তবমুখী ২x২ সিট ম্যাপ, তাৎক্ষণিক যাত্রী বুকিং ও স্বয়ংক্রিয় প্রিন্টযোগ্য টিকেট স্লিপ</a:t>
+            </a:r>
+          </a:p>
+        </p:txBody>
+      </p:sp>
+      <p:sp>
+        <p:nvSpPr>
+          <p:cNvPr id="12" name="Rounded Rectangle 11"/>
+          <p:cNvSpPr/>
+          <p:nvPr/>
+        </p:nvSpPr>
+        <p:spPr>
+          <a:xfrm>
+            <a:off x="8823960" y="4297680"/>
+            <a:ext cx="2560320" cy="1645920"/>
+          </a:xfrm>
+          <a:prstGeom prst="roundRect">
+            <a:avLst/>
+          </a:prstGeom>
+          <a:solidFill>
+            <a:srgbClr val="1E293B"/>
+          </a:solidFill>
+          <a:ln>
+            <a:solidFill>
+              <a:srgbClr val="334155"/>
+            </a:solidFill>
+          </a:ln>
+        </p:spPr>
+        <p:style>
+          <a:lnRef idx="1">
+            <a:schemeClr val="accent1"/>
+          </a:lnRef>
+          <a:fillRef idx="3">
+            <a:schemeClr val="accent1"/>
+          </a:fillRef>
+          <a:effectRef idx="2">
+            <a:schemeClr val="accent1"/>
+          </a:effectRef>
+          <a:fontRef idx="minor">
+            <a:schemeClr val="lt1"/>
+          </a:fontRef>
+        </p:style>
+        <p:txBody>
+          <a:bodyPr rtlCol="0" anchor="ctr"/>
+          <a:lstStyle/>
+          <a:p>
+            <a:pPr algn="ctr"/>
+          </a:p>
+        </p:txBody>
+      </p:sp>
+      <p:sp>
+        <p:nvSpPr>
+          <p:cNvPr id="13" name="TextBox 12"/>
           <p:cNvSpPr txBox="1"/>
           <p:nvPr/>
         </p:nvSpPr>
         <p:spPr>
           <a:xfrm>
-            <a:off x="731520" y="6035040"/>
-            <a:ext cx="10698480" cy="457200"/>
+            <a:off x="8988552" y="4434840"/>
+            <a:ext cx="2231136" cy="1371600"/>
           </a:xfrm>
           <a:prstGeom prst="rect">
             <a:avLst/>
@@ -3552,6 +3650,56 @@
           <a:noFill/>
         </p:spPr>
         <p:txBody>
+          <a:bodyPr wrap="square">
+            <a:spAutoFit/>
+          </a:bodyPr>
+          <a:lstStyle/>
+          <a:p>
+            <a:pPr>
+              <a:spcAft>
+                <a:spcPts val="400"/>
+              </a:spcAft>
+              <a:defRPr sz="1100" b="1">
+                <a:solidFill>
+                  <a:srgbClr val="FFFFFF"/>
+                </a:solidFill>
+              </a:defRPr>
+            </a:pPr>
+            <a:r>
+              <a:t>⏱️ 2-3 MONTHS ROADMAP</a:t>
+            </a:r>
+          </a:p>
+          <a:p>
+            <a:pPr>
+              <a:defRPr sz="950">
+                <a:solidFill>
+                  <a:srgbClr val="94A3B8"/>
+                </a:solidFill>
+              </a:defRPr>
+            </a:pPr>
+            <a:r>
+              <a:t>UI/UX ডিজাইন, ব্যাকএন্ড API আর্কিটেকচার, RBAC রোল ম্যানেজমেন্ট ও ক্লাউড ডেপ্লয়মেন্ট</a:t>
+            </a:r>
+          </a:p>
+        </p:txBody>
+      </p:sp>
+      <p:sp>
+        <p:nvSpPr>
+          <p:cNvPr id="14" name="TextBox 13"/>
+          <p:cNvSpPr txBox="1"/>
+          <p:nvPr/>
+        </p:nvSpPr>
+        <p:spPr>
+          <a:xfrm>
+            <a:off x="731520" y="6217920"/>
+            <a:ext cx="10698480" cy="365760"/>
+          </a:xfrm>
+          <a:prstGeom prst="rect">
+            <a:avLst/>
+          </a:prstGeom>
+          <a:noFill/>
+        </p:spPr>
+        <p:txBody>
           <a:bodyPr wrap="none">
             <a:spAutoFit/>
           </a:bodyPr>
@@ -3565,7 +3713,1548 @@
               </a:defRPr>
             </a:pPr>
             <a:r>
-              <a:t>Developed using HTML5, Tailwind CSS &amp; Pure Vanilla JavaScript • Fully Responsive Single Page Application</a:t>
+              <a:t>Architecture: Single Page Application • Tailwind CSS • Responsive UI • RESTful APIs • Production Ready</a:t>
+            </a:r>
+          </a:p>
+        </p:txBody>
+      </p:sp>
+    </p:spTree>
+  </p:cSld>
+  <p:clrMapOvr>
+    <a:masterClrMapping/>
+  </p:clrMapOvr>
+</p:sld>
+</file>
+
+<file path=ppt/slides/slide10.xml><?xml version="1.0" encoding="utf-8"?>
+<p:sld xmlns:a="http://schemas.openxmlformats.org/drawingml/2006/main" xmlns:p="http://schemas.openxmlformats.org/presentationml/2006/main" xmlns:r="http://schemas.openxmlformats.org/officeDocument/2006/relationships">
+  <p:cSld>
+    <p:spTree>
+      <p:nvGrpSpPr>
+        <p:cNvPr id="1" name=""/>
+        <p:cNvGrpSpPr/>
+        <p:nvPr/>
+      </p:nvGrpSpPr>
+      <p:grpSpPr/>
+      <p:sp>
+        <p:nvSpPr>
+          <p:cNvPr id="2" name="Rectangle 1"/>
+          <p:cNvSpPr/>
+          <p:nvPr/>
+        </p:nvSpPr>
+        <p:spPr>
+          <a:xfrm>
+            <a:off x="0" y="0"/>
+            <a:ext cx="12191695" cy="6858000"/>
+          </a:xfrm>
+          <a:prstGeom prst="rect">
+            <a:avLst/>
+          </a:prstGeom>
+          <a:solidFill>
+            <a:srgbClr val="F8FAFC"/>
+          </a:solidFill>
+          <a:ln>
+            <a:noFill/>
+          </a:ln>
+        </p:spPr>
+        <p:style>
+          <a:lnRef idx="1">
+            <a:schemeClr val="accent1"/>
+          </a:lnRef>
+          <a:fillRef idx="3">
+            <a:schemeClr val="accent1"/>
+          </a:fillRef>
+          <a:effectRef idx="2">
+            <a:schemeClr val="accent1"/>
+          </a:effectRef>
+          <a:fontRef idx="minor">
+            <a:schemeClr val="lt1"/>
+          </a:fontRef>
+        </p:style>
+        <p:txBody>
+          <a:bodyPr rtlCol="0" anchor="ctr"/>
+          <a:lstStyle/>
+          <a:p>
+            <a:pPr algn="ctr"/>
+          </a:p>
+        </p:txBody>
+      </p:sp>
+      <p:sp>
+        <p:nvSpPr>
+          <p:cNvPr id="3" name="TextBox 2"/>
+          <p:cNvSpPr txBox="1"/>
+          <p:nvPr/>
+        </p:nvSpPr>
+        <p:spPr>
+          <a:xfrm>
+            <a:off x="731520" y="365760"/>
+            <a:ext cx="10698480" cy="1097280"/>
+          </a:xfrm>
+          <a:prstGeom prst="rect">
+            <a:avLst/>
+          </a:prstGeom>
+          <a:noFill/>
+        </p:spPr>
+        <p:txBody>
+          <a:bodyPr wrap="square" lIns="0" tIns="0" rIns="0" bIns="0">
+            <a:spAutoFit/>
+          </a:bodyPr>
+          <a:lstStyle/>
+          <a:p>
+            <a:pPr>
+              <a:defRPr sz="1000" b="1">
+                <a:solidFill>
+                  <a:srgbClr val="4F46E5"/>
+                </a:solidFill>
+              </a:defRPr>
+            </a:pPr>
+            <a:r>
+              <a:t>DEVELOPMENT ROADMAP</a:t>
+            </a:r>
+          </a:p>
+          <a:p>
+            <a:pPr>
+              <a:spcAft>
+                <a:spcPts val="200"/>
+              </a:spcAft>
+              <a:defRPr sz="2200" b="1">
+                <a:solidFill>
+                  <a:srgbClr val="0F172A"/>
+                </a:solidFill>
+              </a:defRPr>
+            </a:pPr>
+            <a:r>
+              <a:t>সম্পূর্ণ প্রজেক্ট ডেভেলপমেন্ট টাইমলাইন (২-৩ মাস / ১০-১২ সপ্তাহ)</a:t>
+            </a:r>
+          </a:p>
+          <a:p>
+            <a:pPr>
+              <a:defRPr sz="1100">
+                <a:solidFill>
+                  <a:srgbClr val="64748B"/>
+                </a:solidFill>
+              </a:defRPr>
+            </a:pPr>
+            <a:r>
+              <a:t>UI/UX ডিজাইন, রেসপন্সিভ লেআউট, ব্যাকএন্ড API, ডাটাবেস আর্কিটেকচার ও রোল ম্যানেজমেন্ট (RBAC)</a:t>
+            </a:r>
+          </a:p>
+        </p:txBody>
+      </p:sp>
+      <p:sp>
+        <p:nvSpPr>
+          <p:cNvPr id="4" name="Rounded Rectangle 3"/>
+          <p:cNvSpPr/>
+          <p:nvPr/>
+        </p:nvSpPr>
+        <p:spPr>
+          <a:xfrm>
+            <a:off x="731520" y="1600200"/>
+            <a:ext cx="2560320" cy="4114800"/>
+          </a:xfrm>
+          <a:prstGeom prst="roundRect">
+            <a:avLst/>
+          </a:prstGeom>
+          <a:solidFill>
+            <a:srgbClr val="FFFFFF"/>
+          </a:solidFill>
+          <a:ln>
+            <a:solidFill>
+              <a:srgbClr val="E2E8F0"/>
+            </a:solidFill>
+          </a:ln>
+        </p:spPr>
+        <p:style>
+          <a:lnRef idx="1">
+            <a:schemeClr val="accent1"/>
+          </a:lnRef>
+          <a:fillRef idx="3">
+            <a:schemeClr val="accent1"/>
+          </a:fillRef>
+          <a:effectRef idx="2">
+            <a:schemeClr val="accent1"/>
+          </a:effectRef>
+          <a:fontRef idx="minor">
+            <a:schemeClr val="lt1"/>
+          </a:fontRef>
+        </p:style>
+        <p:txBody>
+          <a:bodyPr rtlCol="0" anchor="ctr"/>
+          <a:lstStyle/>
+          <a:p>
+            <a:pPr algn="ctr"/>
+          </a:p>
+        </p:txBody>
+      </p:sp>
+      <p:sp>
+        <p:nvSpPr>
+          <p:cNvPr id="5" name="Rounded Rectangle 4"/>
+          <p:cNvSpPr/>
+          <p:nvPr/>
+        </p:nvSpPr>
+        <p:spPr>
+          <a:xfrm>
+            <a:off x="841248" y="1709928"/>
+            <a:ext cx="2340864" cy="292608"/>
+          </a:xfrm>
+          <a:prstGeom prst="roundRect">
+            <a:avLst/>
+          </a:prstGeom>
+          <a:solidFill>
+            <a:srgbClr val="EEF2FF"/>
+          </a:solidFill>
+          <a:ln>
+            <a:solidFill>
+              <a:srgbClr val="4F46E5"/>
+            </a:solidFill>
+          </a:ln>
+        </p:spPr>
+        <p:style>
+          <a:lnRef idx="1">
+            <a:schemeClr val="accent1"/>
+          </a:lnRef>
+          <a:fillRef idx="3">
+            <a:schemeClr val="accent1"/>
+          </a:fillRef>
+          <a:effectRef idx="2">
+            <a:schemeClr val="accent1"/>
+          </a:effectRef>
+          <a:fontRef idx="minor">
+            <a:schemeClr val="lt1"/>
+          </a:fontRef>
+        </p:style>
+        <p:txBody>
+          <a:bodyPr rtlCol="0" anchor="ctr"/>
+          <a:lstStyle/>
+          <a:p>
+            <a:pPr algn="ctr">
+              <a:defRPr sz="900" b="1">
+                <a:solidFill>
+                  <a:srgbClr val="4F46E5"/>
+                </a:solidFill>
+              </a:defRPr>
+            </a:pPr>
+            <a:r>
+              <a:t>PHASE 1 (Week 1 - 3)</a:t>
+            </a:r>
+          </a:p>
+        </p:txBody>
+      </p:sp>
+      <p:sp>
+        <p:nvSpPr>
+          <p:cNvPr id="6" name="TextBox 5"/>
+          <p:cNvSpPr txBox="1"/>
+          <p:nvPr/>
+        </p:nvSpPr>
+        <p:spPr>
+          <a:xfrm>
+            <a:off x="859536" y="2057400"/>
+            <a:ext cx="2304288" cy="3566160"/>
+          </a:xfrm>
+          <a:prstGeom prst="rect">
+            <a:avLst/>
+          </a:prstGeom>
+          <a:noFill/>
+        </p:spPr>
+        <p:txBody>
+          <a:bodyPr wrap="square">
+            <a:spAutoFit/>
+          </a:bodyPr>
+          <a:lstStyle/>
+          <a:p>
+            <a:pPr>
+              <a:spcAft>
+                <a:spcPts val="200"/>
+              </a:spcAft>
+              <a:defRPr sz="1150" b="1">
+                <a:solidFill>
+                  <a:srgbClr val="0F172A"/>
+                </a:solidFill>
+              </a:defRPr>
+            </a:pPr>
+            <a:r>
+              <a:t>UI/UX &amp; Responsive Frontend</a:t>
+            </a:r>
+          </a:p>
+          <a:p>
+            <a:pPr>
+              <a:spcAft>
+                <a:spcPts val="800"/>
+              </a:spcAft>
+              <a:defRPr sz="900" b="1">
+                <a:solidFill>
+                  <a:srgbClr val="4F46E5"/>
+                </a:solidFill>
+              </a:defRPr>
+            </a:pPr>
+            <a:r>
+              <a:t>১ম মাস • ফ্রন্টএন্ড ডিজাইন</a:t>
+            </a:r>
+          </a:p>
+          <a:p>
+            <a:pPr>
+              <a:defRPr sz="950" b="1">
+                <a:solidFill>
+                  <a:srgbClr val="0F172A"/>
+                </a:solidFill>
+              </a:defRPr>
+            </a:pPr>
+            <a:r>
+              <a:t>🎨 UI/UX Wireframing</a:t>
+            </a:r>
+          </a:p>
+          <a:p>
+            <a:pPr>
+              <a:spcAft>
+                <a:spcPts val="400"/>
+              </a:spcAft>
+              <a:defRPr sz="850">
+                <a:solidFill>
+                  <a:srgbClr val="64748B"/>
+                </a:solidFill>
+              </a:defRPr>
+            </a:pPr>
+            <a:r>
+              <a:t>Tailwind CSS ও Figma ডিজাইন সিস্টেম তৈরি।</a:t>
+            </a:r>
+          </a:p>
+          <a:p>
+            <a:pPr>
+              <a:defRPr sz="950" b="1">
+                <a:solidFill>
+                  <a:srgbClr val="0F172A"/>
+                </a:solidFill>
+              </a:defRPr>
+            </a:pPr>
+            <a:r>
+              <a:t>📱 100% Responsive Design</a:t>
+            </a:r>
+          </a:p>
+          <a:p>
+            <a:pPr>
+              <a:spcAft>
+                <a:spcPts val="400"/>
+              </a:spcAft>
+              <a:defRPr sz="850">
+                <a:solidFill>
+                  <a:srgbClr val="64748B"/>
+                </a:solidFill>
+              </a:defRPr>
+            </a:pPr>
+            <a:r>
+              <a:t>ডেস্কটপ সাইডবার ও মোবাইল ড্রয়ার লেআউট।</a:t>
+            </a:r>
+          </a:p>
+          <a:p>
+            <a:pPr>
+              <a:defRPr sz="950" b="1">
+                <a:solidFill>
+                  <a:srgbClr val="0F172A"/>
+                </a:solidFill>
+              </a:defRPr>
+            </a:pPr>
+            <a:r>
+              <a:t>💺 2x2 Seat Map Component</a:t>
+            </a:r>
+          </a:p>
+          <a:p>
+            <a:pPr>
+              <a:spcAft>
+                <a:spcPts val="400"/>
+              </a:spcAft>
+              <a:defRPr sz="850">
+                <a:solidFill>
+                  <a:srgbClr val="64748B"/>
+                </a:solidFill>
+              </a:defRPr>
+            </a:pPr>
+            <a:r>
+              <a:t>বাসের ফিজিক্যাল আসন বিন্যাস ও গ্রিন/রেড স্টেট।</a:t>
+            </a:r>
+          </a:p>
+          <a:p>
+            <a:pPr>
+              <a:defRPr sz="950" b="1">
+                <a:solidFill>
+                  <a:srgbClr val="0F172A"/>
+                </a:solidFill>
+              </a:defRPr>
+            </a:pPr>
+            <a:r>
+              <a:t>🏢 10 Counter Card Modules</a:t>
+            </a:r>
+          </a:p>
+          <a:p>
+            <a:pPr>
+              <a:spcAft>
+                <a:spcPts val="400"/>
+              </a:spcAft>
+              <a:defRPr sz="850">
+                <a:solidFill>
+                  <a:srgbClr val="64748B"/>
+                </a:solidFill>
+              </a:defRPr>
+            </a:pPr>
+            <a:r>
+              <a:t>১০টি কাউন্টার স্ট্যাটাস উইজেট ও ডিপারচার টেবিল।</a:t>
+            </a:r>
+          </a:p>
+          <a:p>
+            <a:pPr>
+              <a:defRPr sz="950" b="1">
+                <a:solidFill>
+                  <a:srgbClr val="0F172A"/>
+                </a:solidFill>
+              </a:defRPr>
+            </a:pPr>
+            <a:r>
+              <a:t>⚡ Client-Side Validation</a:t>
+            </a:r>
+          </a:p>
+          <a:p>
+            <a:pPr>
+              <a:spcAft>
+                <a:spcPts val="400"/>
+              </a:spcAft>
+              <a:defRPr sz="850">
+                <a:solidFill>
+                  <a:srgbClr val="64748B"/>
+                </a:solidFill>
+              </a:defRPr>
+            </a:pPr>
+            <a:r>
+              <a:t>টিকেট বুকিং ও বাস CRUD ইনপুট ভ্যালিডেশন।</a:t>
+            </a:r>
+          </a:p>
+        </p:txBody>
+      </p:sp>
+      <p:sp>
+        <p:nvSpPr>
+          <p:cNvPr id="7" name="Rounded Rectangle 6"/>
+          <p:cNvSpPr/>
+          <p:nvPr/>
+        </p:nvSpPr>
+        <p:spPr>
+          <a:xfrm>
+            <a:off x="3456432" y="1600200"/>
+            <a:ext cx="2560320" cy="4114800"/>
+          </a:xfrm>
+          <a:prstGeom prst="roundRect">
+            <a:avLst/>
+          </a:prstGeom>
+          <a:solidFill>
+            <a:srgbClr val="FFFFFF"/>
+          </a:solidFill>
+          <a:ln>
+            <a:solidFill>
+              <a:srgbClr val="E2E8F0"/>
+            </a:solidFill>
+          </a:ln>
+        </p:spPr>
+        <p:style>
+          <a:lnRef idx="1">
+            <a:schemeClr val="accent1"/>
+          </a:lnRef>
+          <a:fillRef idx="3">
+            <a:schemeClr val="accent1"/>
+          </a:fillRef>
+          <a:effectRef idx="2">
+            <a:schemeClr val="accent1"/>
+          </a:effectRef>
+          <a:fontRef idx="minor">
+            <a:schemeClr val="lt1"/>
+          </a:fontRef>
+        </p:style>
+        <p:txBody>
+          <a:bodyPr rtlCol="0" anchor="ctr"/>
+          <a:lstStyle/>
+          <a:p>
+            <a:pPr algn="ctr"/>
+          </a:p>
+        </p:txBody>
+      </p:sp>
+      <p:sp>
+        <p:nvSpPr>
+          <p:cNvPr id="8" name="Rounded Rectangle 7"/>
+          <p:cNvSpPr/>
+          <p:nvPr/>
+        </p:nvSpPr>
+        <p:spPr>
+          <a:xfrm>
+            <a:off x="3566160" y="1709928"/>
+            <a:ext cx="2340864" cy="292608"/>
+          </a:xfrm>
+          <a:prstGeom prst="roundRect">
+            <a:avLst/>
+          </a:prstGeom>
+          <a:solidFill>
+            <a:srgbClr val="F0F9FF"/>
+          </a:solidFill>
+          <a:ln>
+            <a:solidFill>
+              <a:srgbClr val="0EA5E9"/>
+            </a:solidFill>
+          </a:ln>
+        </p:spPr>
+        <p:style>
+          <a:lnRef idx="1">
+            <a:schemeClr val="accent1"/>
+          </a:lnRef>
+          <a:fillRef idx="3">
+            <a:schemeClr val="accent1"/>
+          </a:fillRef>
+          <a:effectRef idx="2">
+            <a:schemeClr val="accent1"/>
+          </a:effectRef>
+          <a:fontRef idx="minor">
+            <a:schemeClr val="lt1"/>
+          </a:fontRef>
+        </p:style>
+        <p:txBody>
+          <a:bodyPr rtlCol="0" anchor="ctr"/>
+          <a:lstStyle/>
+          <a:p>
+            <a:pPr algn="ctr">
+              <a:defRPr sz="900" b="1">
+                <a:solidFill>
+                  <a:srgbClr val="0EA5E9"/>
+                </a:solidFill>
+              </a:defRPr>
+            </a:pPr>
+            <a:r>
+              <a:t>PHASE 2 (Week 4 - 6)</a:t>
+            </a:r>
+          </a:p>
+        </p:txBody>
+      </p:sp>
+      <p:sp>
+        <p:nvSpPr>
+          <p:cNvPr id="9" name="TextBox 8"/>
+          <p:cNvSpPr txBox="1"/>
+          <p:nvPr/>
+        </p:nvSpPr>
+        <p:spPr>
+          <a:xfrm>
+            <a:off x="3584448" y="2057400"/>
+            <a:ext cx="2304288" cy="3566160"/>
+          </a:xfrm>
+          <a:prstGeom prst="rect">
+            <a:avLst/>
+          </a:prstGeom>
+          <a:noFill/>
+        </p:spPr>
+        <p:txBody>
+          <a:bodyPr wrap="square">
+            <a:spAutoFit/>
+          </a:bodyPr>
+          <a:lstStyle/>
+          <a:p>
+            <a:pPr>
+              <a:spcAft>
+                <a:spcPts val="200"/>
+              </a:spcAft>
+              <a:defRPr sz="1150" b="1">
+                <a:solidFill>
+                  <a:srgbClr val="0F172A"/>
+                </a:solidFill>
+              </a:defRPr>
+            </a:pPr>
+            <a:r>
+              <a:t>Backend API &amp; Database</a:t>
+            </a:r>
+          </a:p>
+          <a:p>
+            <a:pPr>
+              <a:spcAft>
+                <a:spcPts val="800"/>
+              </a:spcAft>
+              <a:defRPr sz="900" b="1">
+                <a:solidFill>
+                  <a:srgbClr val="0EA5E9"/>
+                </a:solidFill>
+              </a:defRPr>
+            </a:pPr>
+            <a:r>
+              <a:t>১.৫ মাস • ডাটাবেস ও এপিআই</a:t>
+            </a:r>
+          </a:p>
+          <a:p>
+            <a:pPr>
+              <a:defRPr sz="950" b="1">
+                <a:solidFill>
+                  <a:srgbClr val="0F172A"/>
+                </a:solidFill>
+              </a:defRPr>
+            </a:pPr>
+            <a:r>
+              <a:t>🗄️ Database Architecture</a:t>
+            </a:r>
+          </a:p>
+          <a:p>
+            <a:pPr>
+              <a:spcAft>
+                <a:spcPts val="400"/>
+              </a:spcAft>
+              <a:defRPr sz="850">
+                <a:solidFill>
+                  <a:srgbClr val="64748B"/>
+                </a:solidFill>
+              </a:defRPr>
+            </a:pPr>
+            <a:r>
+              <a:t>PostgreSQL/MySQL রিলেশনাল স্কিমা ডিজাইন।</a:t>
+            </a:r>
+          </a:p>
+          <a:p>
+            <a:pPr>
+              <a:defRPr sz="950" b="1">
+                <a:solidFill>
+                  <a:srgbClr val="0F172A"/>
+                </a:solidFill>
+              </a:defRPr>
+            </a:pPr>
+            <a:r>
+              <a:t>🔗 RESTful API Development</a:t>
+            </a:r>
+          </a:p>
+          <a:p>
+            <a:pPr>
+              <a:spcAft>
+                <a:spcPts val="400"/>
+              </a:spcAft>
+              <a:defRPr sz="850">
+                <a:solidFill>
+                  <a:srgbClr val="64748B"/>
+                </a:solidFill>
+              </a:defRPr>
+            </a:pPr>
+            <a:r>
+              <a:t>বাস ট্রিপ, ১০টি কাউন্টার ও সিট কুয়েরি এন্ডপয়েন্টস।</a:t>
+            </a:r>
+          </a:p>
+          <a:p>
+            <a:pPr>
+              <a:defRPr sz="950" b="1">
+                <a:solidFill>
+                  <a:srgbClr val="0F172A"/>
+                </a:solidFill>
+              </a:defRPr>
+            </a:pPr>
+            <a:r>
+              <a:t>🔒 Concurrency &amp; Seat Locking</a:t>
+            </a:r>
+          </a:p>
+          <a:p>
+            <a:pPr>
+              <a:spcAft>
+                <a:spcPts val="400"/>
+              </a:spcAft>
+              <a:defRPr sz="850">
+                <a:solidFill>
+                  <a:srgbClr val="64748B"/>
+                </a:solidFill>
+              </a:defRPr>
+            </a:pPr>
+            <a:r>
+              <a:t>একই সিট ডাবল বুকিং হওয়া বন্ধে Locking লজিক।</a:t>
+            </a:r>
+          </a:p>
+          <a:p>
+            <a:pPr>
+              <a:defRPr sz="950" b="1">
+                <a:solidFill>
+                  <a:srgbClr val="0F172A"/>
+                </a:solidFill>
+              </a:defRPr>
+            </a:pPr>
+            <a:r>
+              <a:t>🔑 Auth &amp; JWT Security</a:t>
+            </a:r>
+          </a:p>
+          <a:p>
+            <a:pPr>
+              <a:spcAft>
+                <a:spcPts val="400"/>
+              </a:spcAft>
+              <a:defRPr sz="850">
+                <a:solidFill>
+                  <a:srgbClr val="64748B"/>
+                </a:solidFill>
+              </a:defRPr>
+            </a:pPr>
+            <a:r>
+              <a:t>পাসওয়ার্ড হ্যাশিং, টোকেন ও সেশন গার্ড।</a:t>
+            </a:r>
+          </a:p>
+          <a:p>
+            <a:pPr>
+              <a:defRPr sz="950" b="1">
+                <a:solidFill>
+                  <a:srgbClr val="0F172A"/>
+                </a:solidFill>
+              </a:defRPr>
+            </a:pPr>
+            <a:r>
+              <a:t>⚡ Caching &amp; Optimization</a:t>
+            </a:r>
+          </a:p>
+          <a:p>
+            <a:pPr>
+              <a:spcAft>
+                <a:spcPts val="400"/>
+              </a:spcAft>
+              <a:defRPr sz="850">
+                <a:solidFill>
+                  <a:srgbClr val="64748B"/>
+                </a:solidFill>
+              </a:defRPr>
+            </a:pPr>
+            <a:r>
+              <a:t>Redis দিয়ে দ্রুত সিট স্ট্যাটাস রেসপন্স টাইম।</a:t>
+            </a:r>
+          </a:p>
+        </p:txBody>
+      </p:sp>
+      <p:sp>
+        <p:nvSpPr>
+          <p:cNvPr id="10" name="Rounded Rectangle 9"/>
+          <p:cNvSpPr/>
+          <p:nvPr/>
+        </p:nvSpPr>
+        <p:spPr>
+          <a:xfrm>
+            <a:off x="6181344" y="1600200"/>
+            <a:ext cx="2560320" cy="4114800"/>
+          </a:xfrm>
+          <a:prstGeom prst="roundRect">
+            <a:avLst/>
+          </a:prstGeom>
+          <a:solidFill>
+            <a:srgbClr val="FFFFFF"/>
+          </a:solidFill>
+          <a:ln>
+            <a:solidFill>
+              <a:srgbClr val="E2E8F0"/>
+            </a:solidFill>
+          </a:ln>
+        </p:spPr>
+        <p:style>
+          <a:lnRef idx="1">
+            <a:schemeClr val="accent1"/>
+          </a:lnRef>
+          <a:fillRef idx="3">
+            <a:schemeClr val="accent1"/>
+          </a:fillRef>
+          <a:effectRef idx="2">
+            <a:schemeClr val="accent1"/>
+          </a:effectRef>
+          <a:fontRef idx="minor">
+            <a:schemeClr val="lt1"/>
+          </a:fontRef>
+        </p:style>
+        <p:txBody>
+          <a:bodyPr rtlCol="0" anchor="ctr"/>
+          <a:lstStyle/>
+          <a:p>
+            <a:pPr algn="ctr"/>
+          </a:p>
+        </p:txBody>
+      </p:sp>
+      <p:sp>
+        <p:nvSpPr>
+          <p:cNvPr id="11" name="Rounded Rectangle 10"/>
+          <p:cNvSpPr/>
+          <p:nvPr/>
+        </p:nvSpPr>
+        <p:spPr>
+          <a:xfrm>
+            <a:off x="6291072" y="1709928"/>
+            <a:ext cx="2340864" cy="292608"/>
+          </a:xfrm>
+          <a:prstGeom prst="roundRect">
+            <a:avLst/>
+          </a:prstGeom>
+          <a:solidFill>
+            <a:srgbClr val="FEF3C7"/>
+          </a:solidFill>
+          <a:ln>
+            <a:solidFill>
+              <a:srgbClr val="D97706"/>
+            </a:solidFill>
+          </a:ln>
+        </p:spPr>
+        <p:style>
+          <a:lnRef idx="1">
+            <a:schemeClr val="accent1"/>
+          </a:lnRef>
+          <a:fillRef idx="3">
+            <a:schemeClr val="accent1"/>
+          </a:fillRef>
+          <a:effectRef idx="2">
+            <a:schemeClr val="accent1"/>
+          </a:effectRef>
+          <a:fontRef idx="minor">
+            <a:schemeClr val="lt1"/>
+          </a:fontRef>
+        </p:style>
+        <p:txBody>
+          <a:bodyPr rtlCol="0" anchor="ctr"/>
+          <a:lstStyle/>
+          <a:p>
+            <a:pPr algn="ctr">
+              <a:defRPr sz="900" b="1">
+                <a:solidFill>
+                  <a:srgbClr val="D97706"/>
+                </a:solidFill>
+              </a:defRPr>
+            </a:pPr>
+            <a:r>
+              <a:t>PHASE 3 (Week 7 - 9)</a:t>
+            </a:r>
+          </a:p>
+        </p:txBody>
+      </p:sp>
+      <p:sp>
+        <p:nvSpPr>
+          <p:cNvPr id="12" name="TextBox 11"/>
+          <p:cNvSpPr txBox="1"/>
+          <p:nvPr/>
+        </p:nvSpPr>
+        <p:spPr>
+          <a:xfrm>
+            <a:off x="6309360" y="2057400"/>
+            <a:ext cx="2304288" cy="3566160"/>
+          </a:xfrm>
+          <a:prstGeom prst="rect">
+            <a:avLst/>
+          </a:prstGeom>
+          <a:noFill/>
+        </p:spPr>
+        <p:txBody>
+          <a:bodyPr wrap="square">
+            <a:spAutoFit/>
+          </a:bodyPr>
+          <a:lstStyle/>
+          <a:p>
+            <a:pPr>
+              <a:spcAft>
+                <a:spcPts val="200"/>
+              </a:spcAft>
+              <a:defRPr sz="1150" b="1">
+                <a:solidFill>
+                  <a:srgbClr val="0F172A"/>
+                </a:solidFill>
+              </a:defRPr>
+            </a:pPr>
+            <a:r>
+              <a:t>RBAC Roles &amp; POS Engine</a:t>
+            </a:r>
+          </a:p>
+          <a:p>
+            <a:pPr>
+              <a:spcAft>
+                <a:spcPts val="800"/>
+              </a:spcAft>
+              <a:defRPr sz="900" b="1">
+                <a:solidFill>
+                  <a:srgbClr val="D97706"/>
+                </a:solidFill>
+              </a:defRPr>
+            </a:pPr>
+            <a:r>
+              <a:t>২য় মাস • রোল ও বুকিং ইঞ্জিন</a:t>
+            </a:r>
+          </a:p>
+          <a:p>
+            <a:pPr>
+              <a:defRPr sz="950" b="1">
+                <a:solidFill>
+                  <a:srgbClr val="0F172A"/>
+                </a:solidFill>
+              </a:defRPr>
+            </a:pPr>
+            <a:r>
+              <a:t>🛡️ Strict Multi-Role RBAC</a:t>
+            </a:r>
+          </a:p>
+          <a:p>
+            <a:pPr>
+              <a:spcAft>
+                <a:spcPts val="400"/>
+              </a:spcAft>
+              <a:defRPr sz="850">
+                <a:solidFill>
+                  <a:srgbClr val="64748B"/>
+                </a:solidFill>
+              </a:defRPr>
+            </a:pPr>
+            <a:r>
+              <a:t>Super Admin HQ বনাম ১০টি কাউন্টার সেলস পারমিশন।</a:t>
+            </a:r>
+          </a:p>
+          <a:p>
+            <a:pPr>
+              <a:defRPr sz="950" b="1">
+                <a:solidFill>
+                  <a:srgbClr val="0F172A"/>
+                </a:solidFill>
+              </a:defRPr>
+            </a:pPr>
+            <a:r>
+              <a:t>🎫 POS Ticket Generator</a:t>
+            </a:r>
+          </a:p>
+          <a:p>
+            <a:pPr>
+              <a:spcAft>
+                <a:spcPts val="400"/>
+              </a:spcAft>
+              <a:defRPr sz="850">
+                <a:solidFill>
+                  <a:srgbClr val="64748B"/>
+                </a:solidFill>
+              </a:defRPr>
+            </a:pPr>
+            <a:r>
+              <a:t>ইউনিক টিকেট আইডি ও থার্মাল প্রিন্ট ইঞ্জিন।</a:t>
+            </a:r>
+          </a:p>
+          <a:p>
+            <a:pPr>
+              <a:defRPr sz="950" b="1">
+                <a:solidFill>
+                  <a:srgbClr val="0F172A"/>
+                </a:solidFill>
+              </a:defRPr>
+            </a:pPr>
+            <a:r>
+              <a:t>📡 Real-Time WebSockets</a:t>
+            </a:r>
+          </a:p>
+          <a:p>
+            <a:pPr>
+              <a:spcAft>
+                <a:spcPts val="400"/>
+              </a:spcAft>
+              <a:defRPr sz="850">
+                <a:solidFill>
+                  <a:srgbClr val="64748B"/>
+                </a:solidFill>
+              </a:defRPr>
+            </a:pPr>
+            <a:r>
+              <a:t>কাউন্টার থেকে সিট কাটলে হেডকোয়ার্টারে লাইভ সিঙ্ক।</a:t>
+            </a:r>
+          </a:p>
+          <a:p>
+            <a:pPr>
+              <a:defRPr sz="950" b="1">
+                <a:solidFill>
+                  <a:srgbClr val="0F172A"/>
+                </a:solidFill>
+              </a:defRPr>
+            </a:pPr>
+            <a:r>
+              <a:t>💰 Daily Revenue Accounting</a:t>
+            </a:r>
+          </a:p>
+          <a:p>
+            <a:pPr>
+              <a:spcAft>
+                <a:spcPts val="400"/>
+              </a:spcAft>
+              <a:defRPr sz="850">
+                <a:solidFill>
+                  <a:srgbClr val="64748B"/>
+                </a:solidFill>
+              </a:defRPr>
+            </a:pPr>
+            <a:r>
+              <a:t>১০টি কাউন্টারভিত্তিক ক্যাশ ও বিক্রির হিসেব।</a:t>
+            </a:r>
+          </a:p>
+          <a:p>
+            <a:pPr>
+              <a:defRPr sz="950" b="1">
+                <a:solidFill>
+                  <a:srgbClr val="0F172A"/>
+                </a:solidFill>
+              </a:defRPr>
+            </a:pPr>
+            <a:r>
+              <a:t>📋 Passenger Manifest Export</a:t>
+            </a:r>
+          </a:p>
+          <a:p>
+            <a:pPr>
+              <a:spcAft>
+                <a:spcPts val="400"/>
+              </a:spcAft>
+              <a:defRPr sz="850">
+                <a:solidFill>
+                  <a:srgbClr val="64748B"/>
+                </a:solidFill>
+              </a:defRPr>
+            </a:pPr>
+            <a:r>
+              <a:t>বাস সুপারভাইজারের জন্য প্যাসেঞ্জার শিট তৈরি।</a:t>
+            </a:r>
+          </a:p>
+        </p:txBody>
+      </p:sp>
+      <p:sp>
+        <p:nvSpPr>
+          <p:cNvPr id="13" name="Rounded Rectangle 12"/>
+          <p:cNvSpPr/>
+          <p:nvPr/>
+        </p:nvSpPr>
+        <p:spPr>
+          <a:xfrm>
+            <a:off x="8906256" y="1600200"/>
+            <a:ext cx="2560320" cy="4114800"/>
+          </a:xfrm>
+          <a:prstGeom prst="roundRect">
+            <a:avLst/>
+          </a:prstGeom>
+          <a:solidFill>
+            <a:srgbClr val="FFFFFF"/>
+          </a:solidFill>
+          <a:ln>
+            <a:solidFill>
+              <a:srgbClr val="E2E8F0"/>
+            </a:solidFill>
+          </a:ln>
+        </p:spPr>
+        <p:style>
+          <a:lnRef idx="1">
+            <a:schemeClr val="accent1"/>
+          </a:lnRef>
+          <a:fillRef idx="3">
+            <a:schemeClr val="accent1"/>
+          </a:fillRef>
+          <a:effectRef idx="2">
+            <a:schemeClr val="accent1"/>
+          </a:effectRef>
+          <a:fontRef idx="minor">
+            <a:schemeClr val="lt1"/>
+          </a:fontRef>
+        </p:style>
+        <p:txBody>
+          <a:bodyPr rtlCol="0" anchor="ctr"/>
+          <a:lstStyle/>
+          <a:p>
+            <a:pPr algn="ctr"/>
+          </a:p>
+        </p:txBody>
+      </p:sp>
+      <p:sp>
+        <p:nvSpPr>
+          <p:cNvPr id="14" name="Rounded Rectangle 13"/>
+          <p:cNvSpPr/>
+          <p:nvPr/>
+        </p:nvSpPr>
+        <p:spPr>
+          <a:xfrm>
+            <a:off x="9015984" y="1709928"/>
+            <a:ext cx="2340864" cy="292608"/>
+          </a:xfrm>
+          <a:prstGeom prst="roundRect">
+            <a:avLst/>
+          </a:prstGeom>
+          <a:solidFill>
+            <a:srgbClr val="D1FAE5"/>
+          </a:solidFill>
+          <a:ln>
+            <a:solidFill>
+              <a:srgbClr val="10B981"/>
+            </a:solidFill>
+          </a:ln>
+        </p:spPr>
+        <p:style>
+          <a:lnRef idx="1">
+            <a:schemeClr val="accent1"/>
+          </a:lnRef>
+          <a:fillRef idx="3">
+            <a:schemeClr val="accent1"/>
+          </a:fillRef>
+          <a:effectRef idx="2">
+            <a:schemeClr val="accent1"/>
+          </a:effectRef>
+          <a:fontRef idx="minor">
+            <a:schemeClr val="lt1"/>
+          </a:fontRef>
+        </p:style>
+        <p:txBody>
+          <a:bodyPr rtlCol="0" anchor="ctr"/>
+          <a:lstStyle/>
+          <a:p>
+            <a:pPr algn="ctr">
+              <a:defRPr sz="900" b="1">
+                <a:solidFill>
+                  <a:srgbClr val="10B981"/>
+                </a:solidFill>
+              </a:defRPr>
+            </a:pPr>
+            <a:r>
+              <a:t>PHASE 4 (Week 10 - 12)</a:t>
+            </a:r>
+          </a:p>
+        </p:txBody>
+      </p:sp>
+      <p:sp>
+        <p:nvSpPr>
+          <p:cNvPr id="15" name="TextBox 14"/>
+          <p:cNvSpPr txBox="1"/>
+          <p:nvPr/>
+        </p:nvSpPr>
+        <p:spPr>
+          <a:xfrm>
+            <a:off x="9034272" y="2057400"/>
+            <a:ext cx="2304288" cy="3566160"/>
+          </a:xfrm>
+          <a:prstGeom prst="rect">
+            <a:avLst/>
+          </a:prstGeom>
+          <a:noFill/>
+        </p:spPr>
+        <p:txBody>
+          <a:bodyPr wrap="square">
+            <a:spAutoFit/>
+          </a:bodyPr>
+          <a:lstStyle/>
+          <a:p>
+            <a:pPr>
+              <a:spcAft>
+                <a:spcPts val="200"/>
+              </a:spcAft>
+              <a:defRPr sz="1150" b="1">
+                <a:solidFill>
+                  <a:srgbClr val="0F172A"/>
+                </a:solidFill>
+              </a:defRPr>
+            </a:pPr>
+            <a:r>
+              <a:t>Integration, QA &amp; Deployment</a:t>
+            </a:r>
+          </a:p>
+          <a:p>
+            <a:pPr>
+              <a:spcAft>
+                <a:spcPts val="800"/>
+              </a:spcAft>
+              <a:defRPr sz="900" b="1">
+                <a:solidFill>
+                  <a:srgbClr val="10B981"/>
+                </a:solidFill>
+              </a:defRPr>
+            </a:pPr>
+            <a:r>
+              <a:t>৩য় মাস • টেস্টিং ও লাইভ</a:t>
+            </a:r>
+          </a:p>
+          <a:p>
+            <a:pPr>
+              <a:defRPr sz="950" b="1">
+                <a:solidFill>
+                  <a:srgbClr val="0F172A"/>
+                </a:solidFill>
+              </a:defRPr>
+            </a:pPr>
+            <a:r>
+              <a:t>🧪 Full-Scale Load Testing</a:t>
+            </a:r>
+          </a:p>
+          <a:p>
+            <a:pPr>
+              <a:spcAft>
+                <a:spcPts val="400"/>
+              </a:spcAft>
+              <a:defRPr sz="850">
+                <a:solidFill>
+                  <a:srgbClr val="64748B"/>
+                </a:solidFill>
+              </a:defRPr>
+            </a:pPr>
+            <a:r>
+              <a:t>১০টি কাউন্টার থেকে একসাথে ৫০০+ রিকুয়েস্ট টেস্ট।</a:t>
+            </a:r>
+          </a:p>
+          <a:p>
+            <a:pPr>
+              <a:defRPr sz="950" b="1">
+                <a:solidFill>
+                  <a:srgbClr val="0F172A"/>
+                </a:solidFill>
+              </a:defRPr>
+            </a:pPr>
+            <a:r>
+              <a:t>📲 SMS Gateway Integration</a:t>
+            </a:r>
+          </a:p>
+          <a:p>
+            <a:pPr>
+              <a:spcAft>
+                <a:spcPts val="400"/>
+              </a:spcAft>
+              <a:defRPr sz="850">
+                <a:solidFill>
+                  <a:srgbClr val="64748B"/>
+                </a:solidFill>
+              </a:defRPr>
+            </a:pPr>
+            <a:r>
+              <a:t>যাত্রীর ফোনে স্বয়ংক্রিয় টিকেট কনফার্মেশন SMS।</a:t>
+            </a:r>
+          </a:p>
+          <a:p>
+            <a:pPr>
+              <a:defRPr sz="950" b="1">
+                <a:solidFill>
+                  <a:srgbClr val="0F172A"/>
+                </a:solidFill>
+              </a:defRPr>
+            </a:pPr>
+            <a:r>
+              <a:t>☁️ Production Cloud Setup</a:t>
+            </a:r>
+          </a:p>
+          <a:p>
+            <a:pPr>
+              <a:spcAft>
+                <a:spcPts val="400"/>
+              </a:spcAft>
+              <a:defRPr sz="850">
+                <a:solidFill>
+                  <a:srgbClr val="64748B"/>
+                </a:solidFill>
+              </a:defRPr>
+            </a:pPr>
+            <a:r>
+              <a:t>Docker, NGINX SSL, AWS/VPS ও CI/CD পাইপলাইন।</a:t>
+            </a:r>
+          </a:p>
+          <a:p>
+            <a:pPr>
+              <a:defRPr sz="950" b="1">
+                <a:solidFill>
+                  <a:srgbClr val="0F172A"/>
+                </a:solidFill>
+              </a:defRPr>
+            </a:pPr>
+            <a:r>
+              <a:t>🚍 Pilot Terminal Launch</a:t>
+            </a:r>
+          </a:p>
+          <a:p>
+            <a:pPr>
+              <a:spcAft>
+                <a:spcPts val="400"/>
+              </a:spcAft>
+              <a:defRPr sz="850">
+                <a:solidFill>
+                  <a:srgbClr val="64748B"/>
+                </a:solidFill>
+              </a:defRPr>
+            </a:pPr>
+            <a:r>
+              <a:t>সায়েদাবাদ ও গাবতলী কাউন্টারে পাইলট রান।</a:t>
+            </a:r>
+          </a:p>
+          <a:p>
+            <a:pPr>
+              <a:defRPr sz="950" b="1">
+                <a:solidFill>
+                  <a:srgbClr val="0F172A"/>
+                </a:solidFill>
+              </a:defRPr>
+            </a:pPr>
+            <a:r>
+              <a:t>🎓 Staff Training &amp; Handover</a:t>
+            </a:r>
+          </a:p>
+          <a:p>
+            <a:pPr>
+              <a:spcAft>
+                <a:spcPts val="400"/>
+              </a:spcAft>
+              <a:defRPr sz="850">
+                <a:solidFill>
+                  <a:srgbClr val="64748B"/>
+                </a:solidFill>
+              </a:defRPr>
+            </a:pPr>
+            <a:r>
+              <a:t>১০ কাউন্টার কর্মীদের ট্রেনিং ও ফাইনাল ডেলিভারি।</a:t>
+            </a:r>
+          </a:p>
+        </p:txBody>
+      </p:sp>
+      <p:sp>
+        <p:nvSpPr>
+          <p:cNvPr id="16" name="Rounded Rectangle 15"/>
+          <p:cNvSpPr/>
+          <p:nvPr/>
+        </p:nvSpPr>
+        <p:spPr>
+          <a:xfrm>
+            <a:off x="731520" y="5806440"/>
+            <a:ext cx="10698480" cy="640080"/>
+          </a:xfrm>
+          <a:prstGeom prst="roundRect">
+            <a:avLst/>
+          </a:prstGeom>
+          <a:solidFill>
+            <a:srgbClr val="EEF2FF"/>
+          </a:solidFill>
+          <a:ln>
+            <a:solidFill>
+              <a:srgbClr val="E0E7FF"/>
+            </a:solidFill>
+          </a:ln>
+        </p:spPr>
+        <p:style>
+          <a:lnRef idx="1">
+            <a:schemeClr val="accent1"/>
+          </a:lnRef>
+          <a:fillRef idx="3">
+            <a:schemeClr val="accent1"/>
+          </a:fillRef>
+          <a:effectRef idx="2">
+            <a:schemeClr val="accent1"/>
+          </a:effectRef>
+          <a:fontRef idx="minor">
+            <a:schemeClr val="lt1"/>
+          </a:fontRef>
+        </p:style>
+        <p:txBody>
+          <a:bodyPr rtlCol="0" anchor="ctr"/>
+          <a:lstStyle/>
+          <a:p>
+            <a:pPr algn="ctr">
+              <a:defRPr sz="1100" b="1">
+                <a:solidFill>
+                  <a:srgbClr val="4F46E5"/>
+                </a:solidFill>
+              </a:defRPr>
+            </a:pPr>
+            <a:r>
+              <a:t>🏁 টার্গেট টাইমফ্রেম: ২ থেকে ৩ মাস (১০-১২ সপ্তাহ) • ফলাফল: ১০০% স্বয়ংক্রিয়, নিরাপদ ও ১০টি কাউন্টারে তাৎক্ষণিক লাইভ প্রোডাকশন সফটওয়্যার</a:t>
+            </a:r>
+          </a:p>
+        </p:txBody>
+      </p:sp>
+    </p:spTree>
+  </p:cSld>
+  <p:clrMapOvr>
+    <a:masterClrMapping/>
+  </p:clrMapOvr>
+</p:sld>
+</file>
+
+<file path=ppt/slides/slide11.xml><?xml version="1.0" encoding="utf-8"?>
+<p:sld xmlns:a="http://schemas.openxmlformats.org/drawingml/2006/main" xmlns:p="http://schemas.openxmlformats.org/presentationml/2006/main" xmlns:r="http://schemas.openxmlformats.org/officeDocument/2006/relationships">
+  <p:cSld>
+    <p:spTree>
+      <p:nvGrpSpPr>
+        <p:cNvPr id="1" name=""/>
+        <p:cNvGrpSpPr/>
+        <p:nvPr/>
+      </p:nvGrpSpPr>
+      <p:grpSpPr/>
+      <p:sp>
+        <p:nvSpPr>
+          <p:cNvPr id="2" name="Rectangle 1"/>
+          <p:cNvSpPr/>
+          <p:nvPr/>
+        </p:nvSpPr>
+        <p:spPr>
+          <a:xfrm>
+            <a:off x="0" y="0"/>
+            <a:ext cx="12191695" cy="6858000"/>
+          </a:xfrm>
+          <a:prstGeom prst="rect">
+            <a:avLst/>
+          </a:prstGeom>
+          <a:solidFill>
+            <a:srgbClr val="0F172A"/>
+          </a:solidFill>
+          <a:ln>
+            <a:noFill/>
+          </a:ln>
+        </p:spPr>
+        <p:style>
+          <a:lnRef idx="1">
+            <a:schemeClr val="accent1"/>
+          </a:lnRef>
+          <a:fillRef idx="3">
+            <a:schemeClr val="accent1"/>
+          </a:fillRef>
+          <a:effectRef idx="2">
+            <a:schemeClr val="accent1"/>
+          </a:effectRef>
+          <a:fontRef idx="minor">
+            <a:schemeClr val="lt1"/>
+          </a:fontRef>
+        </p:style>
+        <p:txBody>
+          <a:bodyPr rtlCol="0" anchor="ctr"/>
+          <a:lstStyle/>
+          <a:p>
+            <a:pPr algn="ctr"/>
+          </a:p>
+        </p:txBody>
+      </p:sp>
+      <p:sp>
+        <p:nvSpPr>
+          <p:cNvPr id="3" name="Rounded Rectangle 2"/>
+          <p:cNvSpPr/>
+          <p:nvPr/>
+        </p:nvSpPr>
+        <p:spPr>
+          <a:xfrm>
+            <a:off x="1371600" y="914400"/>
+            <a:ext cx="9445752" cy="5029200"/>
+          </a:xfrm>
+          <a:prstGeom prst="roundRect">
+            <a:avLst/>
+          </a:prstGeom>
+          <a:solidFill>
+            <a:srgbClr val="1E293B"/>
+          </a:solidFill>
+          <a:ln>
+            <a:solidFill>
+              <a:srgbClr val="334155"/>
+            </a:solidFill>
+          </a:ln>
+        </p:spPr>
+        <p:style>
+          <a:lnRef idx="1">
+            <a:schemeClr val="accent1"/>
+          </a:lnRef>
+          <a:fillRef idx="3">
+            <a:schemeClr val="accent1"/>
+          </a:fillRef>
+          <a:effectRef idx="2">
+            <a:schemeClr val="accent1"/>
+          </a:effectRef>
+          <a:fontRef idx="minor">
+            <a:schemeClr val="lt1"/>
+          </a:fontRef>
+        </p:style>
+        <p:txBody>
+          <a:bodyPr rtlCol="0" anchor="ctr"/>
+          <a:lstStyle/>
+          <a:p>
+            <a:pPr algn="ctr"/>
+          </a:p>
+        </p:txBody>
+      </p:sp>
+      <p:sp>
+        <p:nvSpPr>
+          <p:cNvPr id="4" name="TextBox 3"/>
+          <p:cNvSpPr txBox="1"/>
+          <p:nvPr/>
+        </p:nvSpPr>
+        <p:spPr>
+          <a:xfrm>
+            <a:off x="1828800" y="1188720"/>
+            <a:ext cx="8531352" cy="4480560"/>
+          </a:xfrm>
+          <a:prstGeom prst="rect">
+            <a:avLst/>
+          </a:prstGeom>
+          <a:noFill/>
+        </p:spPr>
+        <p:txBody>
+          <a:bodyPr wrap="square">
+            <a:spAutoFit/>
+          </a:bodyPr>
+          <a:lstStyle/>
+          <a:p>
+            <a:pPr algn="ctr">
+              <a:spcAft>
+                <a:spcPts val="200"/>
+              </a:spcAft>
+              <a:defRPr sz="4000" b="1">
+                <a:solidFill>
+                  <a:srgbClr val="FFFFFF"/>
+                </a:solidFill>
+              </a:defRPr>
+            </a:pPr>
+            <a:r>
+              <a:t>THANK YOU!</a:t>
+            </a:r>
+          </a:p>
+          <a:p>
+            <a:pPr algn="ctr">
+              <a:spcAft>
+                <a:spcPts val="1400"/>
+              </a:spcAft>
+              <a:defRPr sz="1800" b="1">
+                <a:solidFill>
+                  <a:srgbClr val="E0E7FF"/>
+                </a:solidFill>
+              </a:defRPr>
+            </a:pPr>
+            <a:r>
+              <a:t>আপনাদের মূল্যবান সময় ও মনোযোগের জন্য আন্তরিক ধন্যবাদ</a:t>
+            </a:r>
+          </a:p>
+          <a:p>
+            <a:pPr algn="ctr">
+              <a:spcAft>
+                <a:spcPts val="1800"/>
+              </a:spcAft>
+              <a:defRPr sz="1500" b="1">
+                <a:solidFill>
+                  <a:srgbClr val="10B981"/>
+                </a:solidFill>
+              </a:defRPr>
+            </a:pPr>
+            <a:r>
+              <a:t>Questions &amp; Discussion (প্রশ্নোত্তর ও আলোচনা)</a:t>
+            </a:r>
+          </a:p>
+          <a:p>
+            <a:pPr algn="ctr">
+              <a:spcAft>
+                <a:spcPts val="2400"/>
+              </a:spcAft>
+              <a:defRPr sz="1200" b="1">
+                <a:solidFill>
+                  <a:srgbClr val="E2E8F0"/>
+                </a:solidFill>
+              </a:defRPr>
+            </a:pPr>
+            <a:r>
+              <a:t>🚌 10 Terminals Connected   •   🛡️ Centralized Control   •   ⚡ 2-3 Months Ready to Deliver</a:t>
+            </a:r>
+          </a:p>
+          <a:p>
+            <a:pPr algn="ctr">
+              <a:spcAft>
+                <a:spcPts val="1600"/>
+              </a:spcAft>
+              <a:defRPr sz="1300">
+                <a:solidFill>
+                  <a:srgbClr val="94A3B8"/>
+                </a:solidFill>
+              </a:defRPr>
+            </a:pPr>
+            <a:r>
+              <a:t>আপনার বাস সার্ভিসের ১০টি কাউন্টারে এই অত্যাধুনিক সিস্টেমটি সফলভাবে তৈরি ও বাস্তবায়ন করতে আমরা সম্পূর্ণ প্রস্তুত!</a:t>
+            </a:r>
+          </a:p>
+          <a:p>
+            <a:pPr algn="ctr">
+              <a:defRPr sz="1000">
+                <a:solidFill>
+                  <a:srgbClr val="64748B"/>
+                </a:solidFill>
+              </a:defRPr>
+            </a:pPr>
+            <a:r>
+              <a:t>Project Team: Advanced Full-Stack Engineering • Central Bus Desk Systems</a:t>
             </a:r>
           </a:p>
         </p:txBody>
@@ -3676,7 +5365,7 @@
               </a:defRPr>
             </a:pPr>
             <a:r>
-              <a:t>৯টি প্রধান ইন্টার-ডিস্ট্রিক্ট টার্মিনাল হাব ও রোল বিভাজন</a:t>
+              <a:t>১০টি প্রধান ইন্টার-ডিস্ট্রিক্ট টার্মিনাল হাব ও রোল বিভাজন</a:t>
             </a:r>
           </a:p>
           <a:p>
@@ -3688,7 +5377,7 @@
               </a:defRPr>
             </a:pPr>
             <a:r>
-              <a:t>সেন্ট্রাল অ্যাডমিন মনিটরিং এবং পৃথক টার্মিনাল সেলস একাউন্টের সমন্বিত কাঠামো</a:t>
+              <a:t>সেন্ট্রাল অ্যাডমিন মনিটরিং এবং পৃথক ১০টি টার্মিনাল সেলস একাউন্টের সমন্বিত কাঠামো</a:t>
             </a:r>
           </a:p>
         </p:txBody>
@@ -3702,7 +5391,7 @@
         <p:spPr>
           <a:xfrm>
             <a:off x="731520" y="1645920"/>
-            <a:ext cx="3383280" cy="1188720"/>
+            <a:ext cx="2029968" cy="1737360"/>
           </a:xfrm>
           <a:prstGeom prst="roundRect">
             <a:avLst/>
@@ -3746,8 +5435,8 @@
         </p:nvSpPr>
         <p:spPr>
           <a:xfrm>
-            <a:off x="868680" y="1755648"/>
-            <a:ext cx="3108960" cy="969264"/>
+            <a:off x="841248" y="1737360"/>
+            <a:ext cx="1810512" cy="1554480"/>
           </a:xfrm>
           <a:prstGeom prst="rect">
             <a:avLst/>
@@ -3761,38 +5450,56 @@
           <a:lstStyle/>
           <a:p>
             <a:pPr>
-              <a:defRPr sz="1100" b="1">
+              <a:spcAft>
+                <a:spcPts val="200"/>
+              </a:spcAft>
+              <a:defRPr sz="1050" b="1">
                 <a:solidFill>
                   <a:srgbClr val="0F172A"/>
                 </a:solidFill>
               </a:defRPr>
             </a:pPr>
             <a:r>
-              <a:t>১. গাবতলী কাউন্টার (GAB-01)</a:t>
-            </a:r>
-          </a:p>
-          <a:p>
-            <a:pPr>
-              <a:defRPr sz="950">
+              <a:t>১. গাবতলী (GAB-01)</a:t>
+            </a:r>
+          </a:p>
+          <a:p>
+            <a:pPr>
+              <a:defRPr sz="900">
                 <a:solidFill>
                   <a:srgbClr val="64748B"/>
                 </a:solidFill>
               </a:defRPr>
             </a:pPr>
             <a:r>
-              <a:t>অবস্থান: ঢাকা সেন্ট্রাল | ম্যানেজার: রফিকুল ইসলাম</a:t>
-            </a:r>
-          </a:p>
-          <a:p>
-            <a:pPr>
-              <a:defRPr sz="900" b="1">
+              <a:t>📍 ঢাকা সেন্ট্রাল</a:t>
+            </a:r>
+          </a:p>
+          <a:p>
+            <a:pPr>
+              <a:spcAft>
+                <a:spcPts val="400"/>
+              </a:spcAft>
+              <a:defRPr sz="900">
+                <a:solidFill>
+                  <a:srgbClr val="64748B"/>
+                </a:solidFill>
+              </a:defRPr>
+            </a:pPr>
+            <a:r>
+              <a:t>👤 রফিকুল ইসলাম</a:t>
+            </a:r>
+          </a:p>
+          <a:p>
+            <a:pPr>
+              <a:defRPr sz="850" b="1">
                 <a:solidFill>
                   <a:srgbClr val="4F46E5"/>
                 </a:solidFill>
               </a:defRPr>
             </a:pPr>
             <a:r>
-              <a:t>লগইন: gabtoli@buscentral.com</a:t>
+              <a:t>🔑 gabtoli</a:t>
             </a:r>
           </a:p>
         </p:txBody>
@@ -3805,8 +5512,8 @@
         </p:nvSpPr>
         <p:spPr>
           <a:xfrm>
-            <a:off x="4297680" y="1645920"/>
-            <a:ext cx="3383280" cy="1188720"/>
+            <a:off x="2907792" y="1645920"/>
+            <a:ext cx="2029968" cy="1737360"/>
           </a:xfrm>
           <a:prstGeom prst="roundRect">
             <a:avLst/>
@@ -3850,8 +5557,8 @@
         </p:nvSpPr>
         <p:spPr>
           <a:xfrm>
-            <a:off x="4434840" y="1755648"/>
-            <a:ext cx="3108960" cy="969264"/>
+            <a:off x="3017520" y="1737360"/>
+            <a:ext cx="1810512" cy="1554480"/>
           </a:xfrm>
           <a:prstGeom prst="rect">
             <a:avLst/>
@@ -3865,38 +5572,56 @@
           <a:lstStyle/>
           <a:p>
             <a:pPr>
-              <a:defRPr sz="1100" b="1">
+              <a:spcAft>
+                <a:spcPts val="200"/>
+              </a:spcAft>
+              <a:defRPr sz="1050" b="1">
                 <a:solidFill>
                   <a:srgbClr val="0F172A"/>
                 </a:solidFill>
               </a:defRPr>
             </a:pPr>
             <a:r>
-              <a:t>২. সায়েদাবাদ কাউন্টার (SAY-02)</a:t>
-            </a:r>
-          </a:p>
-          <a:p>
-            <a:pPr>
-              <a:defRPr sz="950">
+              <a:t>২. সায়েদাবাদ (SAY-02)</a:t>
+            </a:r>
+          </a:p>
+          <a:p>
+            <a:pPr>
+              <a:defRPr sz="900">
                 <a:solidFill>
                   <a:srgbClr val="64748B"/>
                 </a:solidFill>
               </a:defRPr>
             </a:pPr>
             <a:r>
-              <a:t>অবস্থান: ঢাকা আন্তঃজেলা | ম্যানেজার: কামাল হোসেন</a:t>
-            </a:r>
-          </a:p>
-          <a:p>
-            <a:pPr>
-              <a:defRPr sz="900" b="1">
+              <a:t>📍 ঢাকা আন্তঃজেলা</a:t>
+            </a:r>
+          </a:p>
+          <a:p>
+            <a:pPr>
+              <a:spcAft>
+                <a:spcPts val="400"/>
+              </a:spcAft>
+              <a:defRPr sz="900">
+                <a:solidFill>
+                  <a:srgbClr val="64748B"/>
+                </a:solidFill>
+              </a:defRPr>
+            </a:pPr>
+            <a:r>
+              <a:t>👤 কামাল হোসেন</a:t>
+            </a:r>
+          </a:p>
+          <a:p>
+            <a:pPr>
+              <a:defRPr sz="850" b="1">
                 <a:solidFill>
                   <a:srgbClr val="4F46E5"/>
                 </a:solidFill>
               </a:defRPr>
             </a:pPr>
             <a:r>
-              <a:t>লগইন: sayedabad@buscentral.com</a:t>
+              <a:t>🔑 sayedabad</a:t>
             </a:r>
           </a:p>
         </p:txBody>
@@ -3909,8 +5634,8 @@
         </p:nvSpPr>
         <p:spPr>
           <a:xfrm>
-            <a:off x="7863840" y="1645920"/>
-            <a:ext cx="3383280" cy="1188720"/>
+            <a:off x="5084064" y="1645920"/>
+            <a:ext cx="2029968" cy="1737360"/>
           </a:xfrm>
           <a:prstGeom prst="roundRect">
             <a:avLst/>
@@ -3954,8 +5679,8 @@
         </p:nvSpPr>
         <p:spPr>
           <a:xfrm>
-            <a:off x="8001000" y="1755648"/>
-            <a:ext cx="3108960" cy="969264"/>
+            <a:off x="5193792" y="1737360"/>
+            <a:ext cx="1810512" cy="1554480"/>
           </a:xfrm>
           <a:prstGeom prst="rect">
             <a:avLst/>
@@ -3969,38 +5694,56 @@
           <a:lstStyle/>
           <a:p>
             <a:pPr>
-              <a:defRPr sz="1100" b="1">
+              <a:spcAft>
+                <a:spcPts val="200"/>
+              </a:spcAft>
+              <a:defRPr sz="1050" b="1">
                 <a:solidFill>
                   <a:srgbClr val="0F172A"/>
                 </a:solidFill>
               </a:defRPr>
             </a:pPr>
             <a:r>
-              <a:t>৩. মহাখালী কাউন্টার (MOH-03)</a:t>
-            </a:r>
-          </a:p>
-          <a:p>
-            <a:pPr>
-              <a:defRPr sz="950">
+              <a:t>৩. মহাখালী (MOH-03)</a:t>
+            </a:r>
+          </a:p>
+          <a:p>
+            <a:pPr>
+              <a:defRPr sz="900">
                 <a:solidFill>
                   <a:srgbClr val="64748B"/>
                 </a:solidFill>
               </a:defRPr>
             </a:pPr>
             <a:r>
-              <a:t>অবস্থান: ঢাকা উত্তর হাব | ম্যানেজার: জাহিদ হাসান</a:t>
-            </a:r>
-          </a:p>
-          <a:p>
-            <a:pPr>
-              <a:defRPr sz="900" b="1">
+              <a:t>📍 ঢাকা উত্তর হাব</a:t>
+            </a:r>
+          </a:p>
+          <a:p>
+            <a:pPr>
+              <a:spcAft>
+                <a:spcPts val="400"/>
+              </a:spcAft>
+              <a:defRPr sz="900">
+                <a:solidFill>
+                  <a:srgbClr val="64748B"/>
+                </a:solidFill>
+              </a:defRPr>
+            </a:pPr>
+            <a:r>
+              <a:t>👤 জাহিদ হাসান</a:t>
+            </a:r>
+          </a:p>
+          <a:p>
+            <a:pPr>
+              <a:defRPr sz="850" b="1">
                 <a:solidFill>
                   <a:srgbClr val="4F46E5"/>
                 </a:solidFill>
               </a:defRPr>
             </a:pPr>
             <a:r>
-              <a:t>লগইন: mohakhali@buscentral.com</a:t>
+              <a:t>🔑 mohakhali</a:t>
             </a:r>
           </a:p>
         </p:txBody>
@@ -4013,8 +5756,8 @@
         </p:nvSpPr>
         <p:spPr>
           <a:xfrm>
-            <a:off x="731520" y="3017520"/>
-            <a:ext cx="3383280" cy="1188720"/>
+            <a:off x="7260336" y="1645920"/>
+            <a:ext cx="2029968" cy="1737360"/>
           </a:xfrm>
           <a:prstGeom prst="roundRect">
             <a:avLst/>
@@ -4058,8 +5801,8 @@
         </p:nvSpPr>
         <p:spPr>
           <a:xfrm>
-            <a:off x="868680" y="3127248"/>
-            <a:ext cx="3108960" cy="969264"/>
+            <a:off x="7370064" y="1737360"/>
+            <a:ext cx="1810512" cy="1554480"/>
           </a:xfrm>
           <a:prstGeom prst="rect">
             <a:avLst/>
@@ -4073,38 +5816,56 @@
           <a:lstStyle/>
           <a:p>
             <a:pPr>
-              <a:defRPr sz="1100" b="1">
+              <a:spcAft>
+                <a:spcPts val="200"/>
+              </a:spcAft>
+              <a:defRPr sz="1050" b="1">
                 <a:solidFill>
                   <a:srgbClr val="0F172A"/>
                 </a:solidFill>
               </a:defRPr>
             </a:pPr>
             <a:r>
-              <a:t>৪. উত্তরা কাউন্টার (UTT-04)</a:t>
-            </a:r>
-          </a:p>
-          <a:p>
-            <a:pPr>
-              <a:defRPr sz="950">
+              <a:t>৪. উত্তরা (UTT-04)</a:t>
+            </a:r>
+          </a:p>
+          <a:p>
+            <a:pPr>
+              <a:defRPr sz="900">
                 <a:solidFill>
                   <a:srgbClr val="64748B"/>
                 </a:solidFill>
               </a:defRPr>
             </a:pPr>
             <a:r>
-              <a:t>অবস্থান: সেক্টর ৭, উত্তরা | ম্যানেজার: তানভীর আহমেদ</a:t>
-            </a:r>
-          </a:p>
-          <a:p>
-            <a:pPr>
-              <a:defRPr sz="900" b="1">
+              <a:t>📍 ঢাকা সেক্টর ৭</a:t>
+            </a:r>
+          </a:p>
+          <a:p>
+            <a:pPr>
+              <a:spcAft>
+                <a:spcPts val="400"/>
+              </a:spcAft>
+              <a:defRPr sz="900">
+                <a:solidFill>
+                  <a:srgbClr val="64748B"/>
+                </a:solidFill>
+              </a:defRPr>
+            </a:pPr>
+            <a:r>
+              <a:t>👤 তানভীর আহমেদ</a:t>
+            </a:r>
+          </a:p>
+          <a:p>
+            <a:pPr>
+              <a:defRPr sz="850" b="1">
                 <a:solidFill>
                   <a:srgbClr val="4F46E5"/>
                 </a:solidFill>
               </a:defRPr>
             </a:pPr>
             <a:r>
-              <a:t>লগইন: uttara@buscentral.com</a:t>
+              <a:t>🔑 uttara</a:t>
             </a:r>
           </a:p>
         </p:txBody>
@@ -4117,8 +5878,8 @@
         </p:nvSpPr>
         <p:spPr>
           <a:xfrm>
-            <a:off x="4297680" y="3017520"/>
-            <a:ext cx="3383280" cy="1188720"/>
+            <a:off x="9436608" y="1645920"/>
+            <a:ext cx="2029968" cy="1737360"/>
           </a:xfrm>
           <a:prstGeom prst="roundRect">
             <a:avLst/>
@@ -4162,8 +5923,8 @@
         </p:nvSpPr>
         <p:spPr>
           <a:xfrm>
-            <a:off x="4434840" y="3127248"/>
-            <a:ext cx="3108960" cy="969264"/>
+            <a:off x="9546336" y="1737360"/>
+            <a:ext cx="1810512" cy="1554480"/>
           </a:xfrm>
           <a:prstGeom prst="rect">
             <a:avLst/>
@@ -4177,38 +5938,56 @@
           <a:lstStyle/>
           <a:p>
             <a:pPr>
-              <a:defRPr sz="1100" b="1">
+              <a:spcAft>
+                <a:spcPts val="200"/>
+              </a:spcAft>
+              <a:defRPr sz="1050" b="1">
                 <a:solidFill>
                   <a:srgbClr val="0F172A"/>
                 </a:solidFill>
               </a:defRPr>
             </a:pPr>
             <a:r>
-              <a:t>৫. চট্টগ্রাম জিইসি (CTG-05)</a:t>
-            </a:r>
-          </a:p>
-          <a:p>
-            <a:pPr>
-              <a:defRPr sz="950">
+              <a:t>৫. চট্টগ্রাম (CTG-05)</a:t>
+            </a:r>
+          </a:p>
+          <a:p>
+            <a:pPr>
+              <a:defRPr sz="900">
                 <a:solidFill>
                   <a:srgbClr val="64748B"/>
                 </a:solidFill>
               </a:defRPr>
             </a:pPr>
             <a:r>
-              <a:t>অবস্থান: জিইসি সার্কেল | ম্যানেজার: নাজমুল হুদা</a:t>
-            </a:r>
-          </a:p>
-          <a:p>
-            <a:pPr>
-              <a:defRPr sz="900" b="1">
+              <a:t>📍 জিইসি সার্কেল</a:t>
+            </a:r>
+          </a:p>
+          <a:p>
+            <a:pPr>
+              <a:spcAft>
+                <a:spcPts val="400"/>
+              </a:spcAft>
+              <a:defRPr sz="900">
+                <a:solidFill>
+                  <a:srgbClr val="64748B"/>
+                </a:solidFill>
+              </a:defRPr>
+            </a:pPr>
+            <a:r>
+              <a:t>👤 নাজমুল হুদা</a:t>
+            </a:r>
+          </a:p>
+          <a:p>
+            <a:pPr>
+              <a:defRPr sz="850" b="1">
                 <a:solidFill>
                   <a:srgbClr val="4F46E5"/>
                 </a:solidFill>
               </a:defRPr>
             </a:pPr>
             <a:r>
-              <a:t>লগইন: chittagong@buscentral.com</a:t>
+              <a:t>🔑 chittagong</a:t>
             </a:r>
           </a:p>
         </p:txBody>
@@ -4221,8 +6000,8 @@
         </p:nvSpPr>
         <p:spPr>
           <a:xfrm>
-            <a:off x="7863840" y="3017520"/>
-            <a:ext cx="3383280" cy="1188720"/>
+            <a:off x="731520" y="3566160"/>
+            <a:ext cx="2029968" cy="1737360"/>
           </a:xfrm>
           <a:prstGeom prst="roundRect">
             <a:avLst/>
@@ -4266,8 +6045,8 @@
         </p:nvSpPr>
         <p:spPr>
           <a:xfrm>
-            <a:off x="8001000" y="3127248"/>
-            <a:ext cx="3108960" cy="969264"/>
+            <a:off x="841248" y="3657600"/>
+            <a:ext cx="1810512" cy="1554480"/>
           </a:xfrm>
           <a:prstGeom prst="rect">
             <a:avLst/>
@@ -4281,38 +6060,56 @@
           <a:lstStyle/>
           <a:p>
             <a:pPr>
-              <a:defRPr sz="1100" b="1">
+              <a:spcAft>
+                <a:spcPts val="200"/>
+              </a:spcAft>
+              <a:defRPr sz="1050" b="1">
                 <a:solidFill>
                   <a:srgbClr val="0F172A"/>
                 </a:solidFill>
               </a:defRPr>
             </a:pPr>
             <a:r>
-              <a:t>৬. কক্সবাজার কাউন্টার (CXB-06)</a:t>
-            </a:r>
-          </a:p>
-          <a:p>
-            <a:pPr>
-              <a:defRPr sz="950">
+              <a:t>৬. কক্সবাজার (CXB-06)</a:t>
+            </a:r>
+          </a:p>
+          <a:p>
+            <a:pPr>
+              <a:defRPr sz="900">
                 <a:solidFill>
                   <a:srgbClr val="64748B"/>
                 </a:solidFill>
               </a:defRPr>
             </a:pPr>
             <a:r>
-              <a:t>অবস্থান: কলাতলী বিচ রোড | ম্যানেজার: মাহবুব আলম</a:t>
-            </a:r>
-          </a:p>
-          <a:p>
-            <a:pPr>
-              <a:defRPr sz="900" b="1">
+              <a:t>📍 কলাতলী বিচ রোড</a:t>
+            </a:r>
+          </a:p>
+          <a:p>
+            <a:pPr>
+              <a:spcAft>
+                <a:spcPts val="400"/>
+              </a:spcAft>
+              <a:defRPr sz="900">
+                <a:solidFill>
+                  <a:srgbClr val="64748B"/>
+                </a:solidFill>
+              </a:defRPr>
+            </a:pPr>
+            <a:r>
+              <a:t>👤 মাহবুব আলম</a:t>
+            </a:r>
+          </a:p>
+          <a:p>
+            <a:pPr>
+              <a:defRPr sz="850" b="1">
                 <a:solidFill>
                   <a:srgbClr val="4F46E5"/>
                 </a:solidFill>
               </a:defRPr>
             </a:pPr>
             <a:r>
-              <a:t>লগইন: coxsbazar@buscentral.com</a:t>
+              <a:t>🔑 coxsbazar</a:t>
             </a:r>
           </a:p>
         </p:txBody>
@@ -4325,8 +6122,8 @@
         </p:nvSpPr>
         <p:spPr>
           <a:xfrm>
-            <a:off x="731520" y="4389120"/>
-            <a:ext cx="3383280" cy="1188720"/>
+            <a:off x="2907792" y="3566160"/>
+            <a:ext cx="2029968" cy="1737360"/>
           </a:xfrm>
           <a:prstGeom prst="roundRect">
             <a:avLst/>
@@ -4370,8 +6167,8 @@
         </p:nvSpPr>
         <p:spPr>
           <a:xfrm>
-            <a:off x="868680" y="4498848"/>
-            <a:ext cx="3108960" cy="969264"/>
+            <a:off x="3017520" y="3657600"/>
+            <a:ext cx="1810512" cy="1554480"/>
           </a:xfrm>
           <a:prstGeom prst="rect">
             <a:avLst/>
@@ -4385,38 +6182,56 @@
           <a:lstStyle/>
           <a:p>
             <a:pPr>
-              <a:defRPr sz="1100" b="1">
+              <a:spcAft>
+                <a:spcPts val="200"/>
+              </a:spcAft>
+              <a:defRPr sz="1050" b="1">
                 <a:solidFill>
                   <a:srgbClr val="0F172A"/>
                 </a:solidFill>
               </a:defRPr>
             </a:pPr>
             <a:r>
-              <a:t>৭. সিলেট কদমতলী (SYL-07)</a:t>
-            </a:r>
-          </a:p>
-          <a:p>
-            <a:pPr>
-              <a:defRPr sz="950">
+              <a:t>৭. সিলেট (SYL-07)</a:t>
+            </a:r>
+          </a:p>
+          <a:p>
+            <a:pPr>
+              <a:defRPr sz="900">
                 <a:solidFill>
                   <a:srgbClr val="64748B"/>
                 </a:solidFill>
               </a:defRPr>
             </a:pPr>
             <a:r>
-              <a:t>অবস্থান: সেন্ট্রাল বাস টার্মিনাল | ম্যানেজার: ফারুক হোসেন</a:t>
-            </a:r>
-          </a:p>
-          <a:p>
-            <a:pPr>
-              <a:defRPr sz="900" b="1">
+              <a:t>📍 কদমতলী সেন্ট্রাল</a:t>
+            </a:r>
+          </a:p>
+          <a:p>
+            <a:pPr>
+              <a:spcAft>
+                <a:spcPts val="400"/>
+              </a:spcAft>
+              <a:defRPr sz="900">
+                <a:solidFill>
+                  <a:srgbClr val="64748B"/>
+                </a:solidFill>
+              </a:defRPr>
+            </a:pPr>
+            <a:r>
+              <a:t>👤 ফারুক হোসেন</a:t>
+            </a:r>
+          </a:p>
+          <a:p>
+            <a:pPr>
+              <a:defRPr sz="850" b="1">
                 <a:solidFill>
                   <a:srgbClr val="4F46E5"/>
                 </a:solidFill>
               </a:defRPr>
             </a:pPr>
             <a:r>
-              <a:t>লগইন: sylhet@buscentral.com</a:t>
+              <a:t>🔑 sylhet</a:t>
             </a:r>
           </a:p>
         </p:txBody>
@@ -4429,8 +6244,8 @@
         </p:nvSpPr>
         <p:spPr>
           <a:xfrm>
-            <a:off x="4297680" y="4389120"/>
-            <a:ext cx="3383280" cy="1188720"/>
+            <a:off x="5084064" y="3566160"/>
+            <a:ext cx="2029968" cy="1737360"/>
           </a:xfrm>
           <a:prstGeom prst="roundRect">
             <a:avLst/>
@@ -4474,8 +6289,8 @@
         </p:nvSpPr>
         <p:spPr>
           <a:xfrm>
-            <a:off x="4434840" y="4498848"/>
-            <a:ext cx="3108960" cy="969264"/>
+            <a:off x="5193792" y="3657600"/>
+            <a:ext cx="1810512" cy="1554480"/>
           </a:xfrm>
           <a:prstGeom prst="rect">
             <a:avLst/>
@@ -4489,38 +6304,56 @@
           <a:lstStyle/>
           <a:p>
             <a:pPr>
-              <a:defRPr sz="1100" b="1">
+              <a:spcAft>
+                <a:spcPts val="200"/>
+              </a:spcAft>
+              <a:defRPr sz="1050" b="1">
                 <a:solidFill>
                   <a:srgbClr val="0F172A"/>
                 </a:solidFill>
               </a:defRPr>
             </a:pPr>
             <a:r>
-              <a:t>৮. রাজশাহী রেলগেট (RAJ-08)</a:t>
-            </a:r>
-          </a:p>
-          <a:p>
-            <a:pPr>
-              <a:defRPr sz="950">
+              <a:t>৮. রাজশাহী (RAJ-08)</a:t>
+            </a:r>
+          </a:p>
+          <a:p>
+            <a:pPr>
+              <a:defRPr sz="900">
                 <a:solidFill>
                   <a:srgbClr val="64748B"/>
                 </a:solidFill>
               </a:defRPr>
             </a:pPr>
             <a:r>
-              <a:t>অবস্থান: স্টেশন রোড | ম্যানেজার: সোহেল রানা</a:t>
-            </a:r>
-          </a:p>
-          <a:p>
-            <a:pPr>
-              <a:defRPr sz="900" b="1">
+              <a:t>📍 রেলগেট স্টেশন</a:t>
+            </a:r>
+          </a:p>
+          <a:p>
+            <a:pPr>
+              <a:spcAft>
+                <a:spcPts val="400"/>
+              </a:spcAft>
+              <a:defRPr sz="900">
+                <a:solidFill>
+                  <a:srgbClr val="64748B"/>
+                </a:solidFill>
+              </a:defRPr>
+            </a:pPr>
+            <a:r>
+              <a:t>👤 সোহেল রানা</a:t>
+            </a:r>
+          </a:p>
+          <a:p>
+            <a:pPr>
+              <a:defRPr sz="850" b="1">
                 <a:solidFill>
                   <a:srgbClr val="4F46E5"/>
                 </a:solidFill>
               </a:defRPr>
             </a:pPr>
             <a:r>
-              <a:t>লগইন: rajshahi@buscentral.com</a:t>
+              <a:t>🔑 rajshahi</a:t>
             </a:r>
           </a:p>
         </p:txBody>
@@ -4533,8 +6366,8 @@
         </p:nvSpPr>
         <p:spPr>
           <a:xfrm>
-            <a:off x="7863840" y="4389120"/>
-            <a:ext cx="3383280" cy="1188720"/>
+            <a:off x="7260336" y="3566160"/>
+            <a:ext cx="2029968" cy="1737360"/>
           </a:xfrm>
           <a:prstGeom prst="roundRect">
             <a:avLst/>
@@ -4578,8 +6411,8 @@
         </p:nvSpPr>
         <p:spPr>
           <a:xfrm>
-            <a:off x="8001000" y="4498848"/>
-            <a:ext cx="3108960" cy="969264"/>
+            <a:off x="7370064" y="3657600"/>
+            <a:ext cx="1810512" cy="1554480"/>
           </a:xfrm>
           <a:prstGeom prst="rect">
             <a:avLst/>
@@ -4593,38 +6426,56 @@
           <a:lstStyle/>
           <a:p>
             <a:pPr>
-              <a:defRPr sz="1100" b="1">
+              <a:spcAft>
+                <a:spcPts val="200"/>
+              </a:spcAft>
+              <a:defRPr sz="1050" b="1">
                 <a:solidFill>
                   <a:srgbClr val="0F172A"/>
                 </a:solidFill>
               </a:defRPr>
             </a:pPr>
             <a:r>
-              <a:t>৯. বগুড়া সাতমাথা (BOG-09)</a:t>
-            </a:r>
-          </a:p>
-          <a:p>
-            <a:pPr>
-              <a:defRPr sz="950">
+              <a:t>৯. বগুড়া (BOG-09)</a:t>
+            </a:r>
+          </a:p>
+          <a:p>
+            <a:pPr>
+              <a:defRPr sz="900">
                 <a:solidFill>
                   <a:srgbClr val="64748B"/>
                 </a:solidFill>
               </a:defRPr>
             </a:pPr>
             <a:r>
-              <a:t>অবস্থান: সাতমাথা সার্কেল | ম্যানেজার: আনোয়ার পারভেজ</a:t>
-            </a:r>
-          </a:p>
-          <a:p>
-            <a:pPr>
-              <a:defRPr sz="900" b="1">
+              <a:t>📍 সাতমাথা সার্কেল</a:t>
+            </a:r>
+          </a:p>
+          <a:p>
+            <a:pPr>
+              <a:spcAft>
+                <a:spcPts val="400"/>
+              </a:spcAft>
+              <a:defRPr sz="900">
+                <a:solidFill>
+                  <a:srgbClr val="64748B"/>
+                </a:solidFill>
+              </a:defRPr>
+            </a:pPr>
+            <a:r>
+              <a:t>👤 আনোয়ার পারভেজ</a:t>
+            </a:r>
+          </a:p>
+          <a:p>
+            <a:pPr>
+              <a:defRPr sz="850" b="1">
                 <a:solidFill>
                   <a:srgbClr val="4F46E5"/>
                 </a:solidFill>
               </a:defRPr>
             </a:pPr>
             <a:r>
-              <a:t>লগইন: bogura@buscentral.com</a:t>
+              <a:t>🔑 bogura</a:t>
             </a:r>
           </a:p>
         </p:txBody>
@@ -4637,8 +6488,130 @@
         </p:nvSpPr>
         <p:spPr>
           <a:xfrm>
-            <a:off x="731520" y="5760720"/>
-            <a:ext cx="10698480" cy="640080"/>
+            <a:off x="9436608" y="3566160"/>
+            <a:ext cx="2029968" cy="1737360"/>
+          </a:xfrm>
+          <a:prstGeom prst="roundRect">
+            <a:avLst/>
+          </a:prstGeom>
+          <a:solidFill>
+            <a:srgbClr val="FFFFFF"/>
+          </a:solidFill>
+          <a:ln>
+            <a:solidFill>
+              <a:srgbClr val="E2E8F0"/>
+            </a:solidFill>
+          </a:ln>
+        </p:spPr>
+        <p:style>
+          <a:lnRef idx="1">
+            <a:schemeClr val="accent1"/>
+          </a:lnRef>
+          <a:fillRef idx="3">
+            <a:schemeClr val="accent1"/>
+          </a:fillRef>
+          <a:effectRef idx="2">
+            <a:schemeClr val="accent1"/>
+          </a:effectRef>
+          <a:fontRef idx="minor">
+            <a:schemeClr val="lt1"/>
+          </a:fontRef>
+        </p:style>
+        <p:txBody>
+          <a:bodyPr rtlCol="0" anchor="ctr"/>
+          <a:lstStyle/>
+          <a:p>
+            <a:pPr algn="ctr"/>
+          </a:p>
+        </p:txBody>
+      </p:sp>
+      <p:sp>
+        <p:nvSpPr>
+          <p:cNvPr id="23" name="TextBox 22"/>
+          <p:cNvSpPr txBox="1"/>
+          <p:nvPr/>
+        </p:nvSpPr>
+        <p:spPr>
+          <a:xfrm>
+            <a:off x="9546336" y="3657600"/>
+            <a:ext cx="1810512" cy="1554480"/>
+          </a:xfrm>
+          <a:prstGeom prst="rect">
+            <a:avLst/>
+          </a:prstGeom>
+          <a:noFill/>
+        </p:spPr>
+        <p:txBody>
+          <a:bodyPr wrap="square">
+            <a:spAutoFit/>
+          </a:bodyPr>
+          <a:lstStyle/>
+          <a:p>
+            <a:pPr>
+              <a:spcAft>
+                <a:spcPts val="200"/>
+              </a:spcAft>
+              <a:defRPr sz="1050" b="1">
+                <a:solidFill>
+                  <a:srgbClr val="0F172A"/>
+                </a:solidFill>
+              </a:defRPr>
+            </a:pPr>
+            <a:r>
+              <a:t>১০. খুলনা (KHU-10)</a:t>
+            </a:r>
+          </a:p>
+          <a:p>
+            <a:pPr>
+              <a:defRPr sz="900">
+                <a:solidFill>
+                  <a:srgbClr val="64748B"/>
+                </a:solidFill>
+              </a:defRPr>
+            </a:pPr>
+            <a:r>
+              <a:t>📍 সোনাডাঙ্গা টার্মিনাল</a:t>
+            </a:r>
+          </a:p>
+          <a:p>
+            <a:pPr>
+              <a:spcAft>
+                <a:spcPts val="400"/>
+              </a:spcAft>
+              <a:defRPr sz="900">
+                <a:solidFill>
+                  <a:srgbClr val="64748B"/>
+                </a:solidFill>
+              </a:defRPr>
+            </a:pPr>
+            <a:r>
+              <a:t>👤 তরিকুল ইসলাম</a:t>
+            </a:r>
+          </a:p>
+          <a:p>
+            <a:pPr>
+              <a:defRPr sz="850" b="1">
+                <a:solidFill>
+                  <a:srgbClr val="4F46E5"/>
+                </a:solidFill>
+              </a:defRPr>
+            </a:pPr>
+            <a:r>
+              <a:t>🔑 khulna</a:t>
+            </a:r>
+          </a:p>
+        </p:txBody>
+      </p:sp>
+      <p:sp>
+        <p:nvSpPr>
+          <p:cNvPr id="24" name="Rounded Rectangle 23"/>
+          <p:cNvSpPr/>
+          <p:nvPr/>
+        </p:nvSpPr>
+        <p:spPr>
+          <a:xfrm>
+            <a:off x="731520" y="5715000"/>
+            <a:ext cx="10698480" cy="685800"/>
           </a:xfrm>
           <a:prstGeom prst="roundRect">
             <a:avLst/>
@@ -4678,7 +6651,7 @@
               </a:defRPr>
             </a:pPr>
             <a:r>
-              <a:t>🎯 সিস্টেমের মূল বৈশিষ্ট্য: প্রতিটি কাউন্টারের নিজস্ব সেলস অফিসার কেবল তাদের কাউন্টারের বাসের তথ্য ও টিকেট ম্যানেজ করবেন, আর সেন্ট্রাল অ্যাডমিন ৯টি কাউন্টারের সামগ্রিক গতিবিধি পর্যবেক্ষণ করবেন।</a:t>
+              <a:t>🎯 সিস্টেমের মূল বৈশিষ্ট্য: ১০টি কাউন্টারের নিজস্ব সেলস অফিসার কেবল তাদের কাউন্টারের বাসের তথ্য ও টিকেট ম্যানেজ করবেন, আর সেন্ট্রাল অ্যাডমিন ১০টি কাউন্টারের সামগ্রিক গতিবিধি এক নজরে তদারকি করবেন।</a:t>
             </a:r>
           </a:p>
         </p:txBody>
@@ -4789,7 +6762,7 @@
               </a:defRPr>
             </a:pPr>
             <a:r>
-              <a:t>লগইন সিস্টেম ও ৯টি কাউন্টারের আলাদা ক্রেডেনশিয়াল</a:t>
+              <a:t>লগইন সিস্টেম ও ১০টি কাউন্টারের আলাদা ক্রেডেনশিয়াল</a:t>
             </a:r>
           </a:p>
           <a:p>
@@ -4893,7 +6866,7 @@
               </a:defRPr>
             </a:pPr>
             <a:r>
-              <a:t>🏢 9 Independent Credentials</a:t>
+              <a:t>🏢 10 Independent Credentials</a:t>
             </a:r>
           </a:p>
           <a:p>
@@ -4908,7 +6881,7 @@
               </a:defRPr>
             </a:pPr>
             <a:r>
-              <a:t>৯টি কাউন্টারের জন্য ৯টি নিজস্ব ইমেইল ও পাসওয়ার্ড সেট করা রয়েছে (যেমন: sayedabad@buscentral.com)।</a:t>
+              <a:t>১০টি কাউন্টারের জন্য ১০টি নিজস্ব ইমেইল ও পাসওয়ার্ড সেট করা রয়েছে (যেমন: sayedabad@buscentral.com, khulna@buscentral.com)।</a:t>
             </a:r>
           </a:p>
           <a:p>
@@ -5121,7 +7094,7 @@
               </a:defRPr>
             </a:pPr>
             <a:r>
-              <a:t>সারাদেশের ৯টি কাউন্টারে আজ কয়টি বাস গেল, কখন গেল এবং কতটি সিট খালি আছে তার লাইভ কন্ট্রোল রুম</a:t>
+              <a:t>সারাদেশের ১০টি কাউন্টারে আজ কয়টি বাস গেল, কখন গেল এবং কতটি সিট খালি আছে তার লাইভ কন্ট্রোল রুম</a:t>
             </a:r>
           </a:p>
         </p:txBody>
@@ -5213,7 +7186,7 @@
               </a:defRPr>
             </a:pPr>
             <a:r>
-              <a:t>🏢 9 Terminals Live Grid</a:t>
+              <a:t>🏢 10 Terminals Live Grid</a:t>
             </a:r>
           </a:p>
           <a:p>
@@ -5258,7 +7231,7 @@
               </a:defRPr>
             </a:pPr>
             <a:r>
-              <a:t>সারাদেশের যেকোনো বাসের নাম্বার, সময়, মোট সিট, বুকড সিট ও ভাড়া সরাসরি নজরদারি করার সুবিধা।</a:t>
+              <a:t>সারাদেশের যেকোনো বাসের নম্বর, সময়, মোট সিট, বুকড সিট ও ভাড়া সরাসরি নজরদারি করার সুবিধা।</a:t>
             </a:r>
           </a:p>
           <a:p>
@@ -5288,7 +7261,7 @@
               </a:defRPr>
             </a:pPr>
             <a:r>
-              <a:t>কাউন্টার সিলেক্ট করে ফিল্টার করা এবং বাস নাম্বার বা গন্তব্য সার্চ করে তাৎক্ষণিক তথ্য পাওয়া।</a:t>
+              <a:t>কাউন্টার সিলেক্ট করে ফিল্টার করা এবং বাস নম্বর বা গন্তব্য সার্চ করে তাৎক্ষণিক তথ্য পাওয়া।</a:t>
             </a:r>
           </a:p>
           <a:p>
@@ -5318,7 +7291,7 @@
               </a:defRPr>
             </a:pPr>
             <a:r>
-              <a:t>সব কাউন্টার মিলিয়ে মোট কত টাকার টিকেট বিক্রি হলো তার কেন্দ্রীয় রাজস্ব নিরীক্ষা।</a:t>
+              <a:t>সব ১০টি কাউন্টার মিলিয়ে মোট কত টাকার টিকেট বিক্রি হলো তার কেন্দ্রীয় রাজস্ব নিরীক্ষা।</a:t>
             </a:r>
           </a:p>
         </p:txBody>
@@ -5608,7 +7581,7 @@
               </a:defRPr>
             </a:pPr>
             <a:r>
-              <a:t>অ্যাডমিন যেকোনো কাউন্টারের বাসের 'সিট দেখুন' বাটনে ক্লিক করলেই এই পপআপ ওপেন হয়ে যায়।</a:t>
+              <a:t>অ্যাডমিন ১০টি কাউন্টারের যেকোনো বাসের 'সিট দেখুন' বাটনে ক্লিক করলেই এই পপআপ ওপেন হয়ে যায়।</a:t>
             </a:r>
           </a:p>
           <a:p>
@@ -6598,7 +8571,7 @@
               </a:defRPr>
             </a:pPr>
             <a:r>
-              <a:t>কাউন্টার থেকে কয়টি টিকেট ইস্যু হলো এবং কত টাকা আদায় হলো তা সাথে সাথে সংরক্ষিত থাকে।</a:t>
+              <a:t>১০টি কাউন্টার থেকে কয়টি টিকেট ইস্যু হলো এবং কত টাকা আদায় হলো তা সাথে সাথে সংরক্ষিত থাকে।</a:t>
             </a:r>
           </a:p>
         </p:txBody>
@@ -6819,7 +8792,7 @@
               </a:defRPr>
             </a:pPr>
             <a:r>
-              <a:t>প্রধান অ্যাডমিন অফিসে বসেই ৯টি টার্মিনালের সকল বাসের অবস্থান ও খালি সিটের রিয়েল-টাইম তথ্য পাচ্ছেন।</a:t>
+              <a:t>প্রধান অ্যাডমিন অফিসে বসেই ১০টি টার্মিনালের সকল বাসের অবস্থান ও খালি সিটের রিয়েল-টাইম তথ্য পাচ্ছেন।</a:t>
             </a:r>
           </a:p>
         </p:txBody>
@@ -6917,7 +8890,7 @@
               </a:defRPr>
             </a:pPr>
             <a:r>
-              <a:t>প্রতিটি কাউন্টারের সেলস টিম স্বাধীনভাবে তাদের বাসের শিডিউল ম্যানেজ ও দ্রুত টিকেট বুকিং করতে পারছে।</a:t>
+              <a:t>১০টি কাউন্টারের সেলস টিম স্বাধীনভাবে তাদের বাসের শিডিউল ম্যানেজ ও দ্রুত টিকেট বুকিং করতে পারছে।</a:t>
             </a:r>
           </a:p>
         </p:txBody>

--- a/Central_Bus_Management_System_Presentation.pptx
+++ b/Central_Bus_Management_System_Presentation.pptx
@@ -5,19 +5,20 @@
     <p:sldMasterId id="2147483648" r:id="rId1"/>
   </p:sldMasterIdLst>
   <p:sldIdLst>
-    <p:sldId id="256" r:id="rId7"/>
-    <p:sldId id="257" r:id="rId8"/>
-    <p:sldId id="258" r:id="rId9"/>
-    <p:sldId id="259" r:id="rId10"/>
-    <p:sldId id="260" r:id="rId11"/>
-    <p:sldId id="261" r:id="rId12"/>
-    <p:sldId id="262" r:id="rId13"/>
-    <p:sldId id="263" r:id="rId14"/>
-    <p:sldId id="264" r:id="rId15"/>
-    <p:sldId id="265" r:id="rId16"/>
-    <p:sldId id="266" r:id="rId17"/>
+    <p:sldId id="256" r:id="rId2"/>
+    <p:sldId id="257" r:id="rId3"/>
+    <p:sldId id="258" r:id="rId4"/>
+    <p:sldId id="259" r:id="rId5"/>
+    <p:sldId id="260" r:id="rId6"/>
+    <p:sldId id="261" r:id="rId7"/>
+    <p:sldId id="262" r:id="rId8"/>
+    <p:sldId id="263" r:id="rId9"/>
+    <p:sldId id="264" r:id="rId10"/>
+    <p:sldId id="265" r:id="rId11"/>
+    <p:sldId id="266" r:id="rId12"/>
+    <p:sldId id="267" r:id="rId13"/>
   </p:sldIdLst>
-  <p:sldSz cx="12191695" cy="6858000" type="screen4x3"/>
+  <p:sldSz cx="12192000" cy="6858000"/>
   <p:notesSz cx="6858000" cy="9144000"/>
   <p:defaultTextStyle>
     <a:defPPr>
@@ -114,6 +115,22 @@
       </a:defRPr>
     </a:lvl9pPr>
   </p:defaultTextStyle>
+  <p:extLst>
+    <p:ext uri="{EFAFB233-063F-42B5-8137-9DF3F51BA10A}">
+      <p15:sldGuideLst xmlns:p15="http://schemas.microsoft.com/office/powerpoint/2012/main">
+        <p15:guide id="1" orient="horz" pos="2160">
+          <p15:clr>
+            <a:srgbClr val="A4A3A4"/>
+          </p15:clr>
+        </p15:guide>
+        <p15:guide id="2" pos="2880">
+          <p15:clr>
+            <a:srgbClr val="A4A3A4"/>
+          </p15:clr>
+        </p15:guide>
+      </p15:sldGuideLst>
+    </p:ext>
+  </p:extLst>
 </p:presentation>
 </file>
 
@@ -298,7 +315,7 @@
           <a:p>
             <a:fld id="{5BCAD085-E8A6-8845-BD4E-CB4CCA059FC4}" type="datetimeFigureOut">
               <a:rPr lang="en-US" smtClean="0"/>
-              <a:t>1/27/13</a:t>
+              <a:t>28-Sep-26</a:t>
             </a:fld>
             <a:endParaRPr lang="en-US"/>
           </a:p>
@@ -468,7 +485,7 @@
           <a:p>
             <a:fld id="{5BCAD085-E8A6-8845-BD4E-CB4CCA059FC4}" type="datetimeFigureOut">
               <a:rPr lang="en-US" smtClean="0"/>
-              <a:t>1/27/13</a:t>
+              <a:t>28-Sep-26</a:t>
             </a:fld>
             <a:endParaRPr lang="en-US"/>
           </a:p>
@@ -648,7 +665,7 @@
           <a:p>
             <a:fld id="{5BCAD085-E8A6-8845-BD4E-CB4CCA059FC4}" type="datetimeFigureOut">
               <a:rPr lang="en-US" smtClean="0"/>
-              <a:t>1/27/13</a:t>
+              <a:t>28-Sep-26</a:t>
             </a:fld>
             <a:endParaRPr lang="en-US"/>
           </a:p>
@@ -818,7 +835,7 @@
           <a:p>
             <a:fld id="{5BCAD085-E8A6-8845-BD4E-CB4CCA059FC4}" type="datetimeFigureOut">
               <a:rPr lang="en-US" smtClean="0"/>
-              <a:t>1/27/13</a:t>
+              <a:t>28-Sep-26</a:t>
             </a:fld>
             <a:endParaRPr lang="en-US"/>
           </a:p>
@@ -1064,7 +1081,7 @@
           <a:p>
             <a:fld id="{5BCAD085-E8A6-8845-BD4E-CB4CCA059FC4}" type="datetimeFigureOut">
               <a:rPr lang="en-US" smtClean="0"/>
-              <a:t>1/27/13</a:t>
+              <a:t>28-Sep-26</a:t>
             </a:fld>
             <a:endParaRPr lang="en-US"/>
           </a:p>
@@ -1352,7 +1369,7 @@
           <a:p>
             <a:fld id="{5BCAD085-E8A6-8845-BD4E-CB4CCA059FC4}" type="datetimeFigureOut">
               <a:rPr lang="en-US" smtClean="0"/>
-              <a:t>1/27/13</a:t>
+              <a:t>28-Sep-26</a:t>
             </a:fld>
             <a:endParaRPr lang="en-US"/>
           </a:p>
@@ -1774,7 +1791,7 @@
           <a:p>
             <a:fld id="{5BCAD085-E8A6-8845-BD4E-CB4CCA059FC4}" type="datetimeFigureOut">
               <a:rPr lang="en-US" smtClean="0"/>
-              <a:t>1/27/13</a:t>
+              <a:t>28-Sep-26</a:t>
             </a:fld>
             <a:endParaRPr lang="en-US"/>
           </a:p>
@@ -1892,7 +1909,7 @@
           <a:p>
             <a:fld id="{5BCAD085-E8A6-8845-BD4E-CB4CCA059FC4}" type="datetimeFigureOut">
               <a:rPr lang="en-US" smtClean="0"/>
-              <a:t>1/27/13</a:t>
+              <a:t>28-Sep-26</a:t>
             </a:fld>
             <a:endParaRPr lang="en-US"/>
           </a:p>
@@ -1987,7 +2004,7 @@
           <a:p>
             <a:fld id="{5BCAD085-E8A6-8845-BD4E-CB4CCA059FC4}" type="datetimeFigureOut">
               <a:rPr lang="en-US" smtClean="0"/>
-              <a:t>1/27/13</a:t>
+              <a:t>28-Sep-26</a:t>
             </a:fld>
             <a:endParaRPr lang="en-US"/>
           </a:p>
@@ -2264,7 +2281,7 @@
           <a:p>
             <a:fld id="{5BCAD085-E8A6-8845-BD4E-CB4CCA059FC4}" type="datetimeFigureOut">
               <a:rPr lang="en-US" smtClean="0"/>
-              <a:t>1/27/13</a:t>
+              <a:t>28-Sep-26</a:t>
             </a:fld>
             <a:endParaRPr lang="en-US"/>
           </a:p>
@@ -2517,7 +2534,7 @@
           <a:p>
             <a:fld id="{5BCAD085-E8A6-8845-BD4E-CB4CCA059FC4}" type="datetimeFigureOut">
               <a:rPr lang="en-US" smtClean="0"/>
-              <a:t>1/27/13</a:t>
+              <a:t>28-Sep-26</a:t>
             </a:fld>
             <a:endParaRPr lang="en-US"/>
           </a:p>
@@ -2730,7 +2747,7 @@
           <a:p>
             <a:fld id="{5BCAD085-E8A6-8845-BD4E-CB4CCA059FC4}" type="datetimeFigureOut">
               <a:rPr lang="en-US" smtClean="0"/>
-              <a:t>1/27/13</a:t>
+              <a:t>28-Sep-26</a:t>
             </a:fld>
             <a:endParaRPr lang="en-US"/>
           </a:p>
@@ -3089,7 +3106,7 @@
 </file>
 
 <file path=ppt/slides/slide1.xml><?xml version="1.0" encoding="utf-8"?>
-<p:sld xmlns:a="http://schemas.openxmlformats.org/drawingml/2006/main" xmlns:p="http://schemas.openxmlformats.org/presentationml/2006/main" xmlns:r="http://schemas.openxmlformats.org/officeDocument/2006/relationships">
+<p:sld xmlns:a="http://schemas.openxmlformats.org/drawingml/2006/main" xmlns:r="http://schemas.openxmlformats.org/officeDocument/2006/relationships" xmlns:p="http://schemas.openxmlformats.org/presentationml/2006/main">
   <p:cSld>
     <p:spTree>
       <p:nvGrpSpPr>
@@ -3097,7 +3114,14 @@
         <p:cNvGrpSpPr/>
         <p:nvPr/>
       </p:nvGrpSpPr>
-      <p:grpSpPr/>
+      <p:grpSpPr>
+        <a:xfrm>
+          <a:off x="0" y="0"/>
+          <a:ext cx="0" cy="0"/>
+          <a:chOff x="0" y="0"/>
+          <a:chExt cx="0" cy="0"/>
+        </a:xfrm>
+      </p:grpSpPr>
       <p:sp>
         <p:nvSpPr>
           <p:cNvPr id="2" name="Rectangle 1"/>
@@ -3138,6 +3162,7 @@
           <a:lstStyle/>
           <a:p>
             <a:pPr algn="ctr"/>
+            <a:endParaRPr/>
           </a:p>
         </p:txBody>
       </p:sp>
@@ -3181,6 +3206,7 @@
           <a:lstStyle/>
           <a:p>
             <a:pPr algn="ctr"/>
+            <a:endParaRPr/>
           </a:p>
         </p:txBody>
       </p:sp>
@@ -3345,6 +3371,7 @@
           <a:lstStyle/>
           <a:p>
             <a:pPr algn="ctr"/>
+            <a:endParaRPr/>
           </a:p>
         </p:txBody>
       </p:sp>
@@ -3440,6 +3467,7 @@
           <a:lstStyle/>
           <a:p>
             <a:pPr algn="ctr"/>
+            <a:endParaRPr/>
           </a:p>
         </p:txBody>
       </p:sp>
@@ -3535,6 +3563,7 @@
           <a:lstStyle/>
           <a:p>
             <a:pPr algn="ctr"/>
+            <a:endParaRPr/>
           </a:p>
         </p:txBody>
       </p:sp>
@@ -3630,6 +3659,7 @@
           <a:lstStyle/>
           <a:p>
             <a:pPr algn="ctr"/>
+            <a:endParaRPr/>
           </a:p>
         </p:txBody>
       </p:sp>
@@ -3727,7 +3757,7 @@
 </file>
 
 <file path=ppt/slides/slide10.xml><?xml version="1.0" encoding="utf-8"?>
-<p:sld xmlns:a="http://schemas.openxmlformats.org/drawingml/2006/main" xmlns:p="http://schemas.openxmlformats.org/presentationml/2006/main" xmlns:r="http://schemas.openxmlformats.org/officeDocument/2006/relationships">
+<p:sld xmlns:a="http://schemas.openxmlformats.org/drawingml/2006/main" xmlns:r="http://schemas.openxmlformats.org/officeDocument/2006/relationships" xmlns:p="http://schemas.openxmlformats.org/presentationml/2006/main">
   <p:cSld>
     <p:spTree>
       <p:nvGrpSpPr>
@@ -3735,7 +3765,541 @@
         <p:cNvGrpSpPr/>
         <p:nvPr/>
       </p:nvGrpSpPr>
-      <p:grpSpPr/>
+      <p:grpSpPr>
+        <a:xfrm>
+          <a:off x="0" y="0"/>
+          <a:ext cx="0" cy="0"/>
+          <a:chOff x="0" y="0"/>
+          <a:chExt cx="0" cy="0"/>
+        </a:xfrm>
+      </p:grpSpPr>
+      <p:sp>
+        <p:nvSpPr>
+          <p:cNvPr id="2" name="Rectangle 1"/>
+          <p:cNvSpPr/>
+          <p:nvPr/>
+        </p:nvSpPr>
+        <p:spPr>
+          <a:xfrm>
+            <a:off x="0" y="0"/>
+            <a:ext cx="12191695" cy="6858000"/>
+          </a:xfrm>
+          <a:prstGeom prst="rect">
+            <a:avLst/>
+          </a:prstGeom>
+          <a:solidFill>
+            <a:srgbClr val="0F172A"/>
+          </a:solidFill>
+          <a:ln>
+            <a:noFill/>
+          </a:ln>
+        </p:spPr>
+        <p:style>
+          <a:lnRef idx="1">
+            <a:schemeClr val="accent1"/>
+          </a:lnRef>
+          <a:fillRef idx="3">
+            <a:schemeClr val="accent1"/>
+          </a:fillRef>
+          <a:effectRef idx="2">
+            <a:schemeClr val="accent1"/>
+          </a:effectRef>
+          <a:fontRef idx="minor">
+            <a:schemeClr val="lt1"/>
+          </a:fontRef>
+        </p:style>
+        <p:txBody>
+          <a:bodyPr rtlCol="0" anchor="ctr"/>
+          <a:lstStyle/>
+          <a:p>
+            <a:pPr algn="ctr"/>
+            <a:endParaRPr/>
+          </a:p>
+        </p:txBody>
+      </p:sp>
+      <p:sp>
+        <p:nvSpPr>
+          <p:cNvPr id="3" name="TextBox 2"/>
+          <p:cNvSpPr txBox="1"/>
+          <p:nvPr/>
+        </p:nvSpPr>
+        <p:spPr>
+          <a:xfrm>
+            <a:off x="731520" y="365760"/>
+            <a:ext cx="10698480" cy="1097280"/>
+          </a:xfrm>
+          <a:prstGeom prst="rect">
+            <a:avLst/>
+          </a:prstGeom>
+          <a:noFill/>
+        </p:spPr>
+        <p:txBody>
+          <a:bodyPr wrap="square" lIns="0" tIns="0" rIns="0" bIns="0">
+            <a:spAutoFit/>
+          </a:bodyPr>
+          <a:lstStyle/>
+          <a:p>
+            <a:pPr>
+              <a:defRPr sz="1000" b="1">
+                <a:solidFill>
+                  <a:srgbClr val="10B981"/>
+                </a:solidFill>
+              </a:defRPr>
+            </a:pPr>
+            <a:r>
+              <a:t>EXECUTIVE SUMMARY</a:t>
+            </a:r>
+          </a:p>
+          <a:p>
+            <a:pPr>
+              <a:spcAft>
+                <a:spcPts val="200"/>
+              </a:spcAft>
+              <a:defRPr sz="2200" b="1">
+                <a:solidFill>
+                  <a:srgbClr val="FFFFFF"/>
+                </a:solidFill>
+              </a:defRPr>
+            </a:pPr>
+            <a:r>
+              <a:t>সিস্টেমের প্রযুক্তিগত উৎকর্ষ ও ব্যবসায়িক সুবিধাসমূহ</a:t>
+            </a:r>
+          </a:p>
+          <a:p>
+            <a:pPr>
+              <a:defRPr sz="1100">
+                <a:solidFill>
+                  <a:srgbClr val="94A3B8"/>
+                </a:solidFill>
+              </a:defRPr>
+            </a:pPr>
+            <a:r>
+              <a:t>বাস ফ্লিট পরিচালনায় ১০০% আধুনিকীকরণ, স্বচ্ছতা এবং আয়ের সর্বোচ্চ সুরক্ষা</a:t>
+            </a:r>
+          </a:p>
+        </p:txBody>
+      </p:sp>
+      <p:sp>
+        <p:nvSpPr>
+          <p:cNvPr id="4" name="Rounded Rectangle 3"/>
+          <p:cNvSpPr/>
+          <p:nvPr/>
+        </p:nvSpPr>
+        <p:spPr>
+          <a:xfrm>
+            <a:off x="731520" y="1737360"/>
+            <a:ext cx="5120640" cy="1828800"/>
+          </a:xfrm>
+          <a:prstGeom prst="roundRect">
+            <a:avLst/>
+          </a:prstGeom>
+          <a:solidFill>
+            <a:srgbClr val="1E293B"/>
+          </a:solidFill>
+          <a:ln>
+            <a:solidFill>
+              <a:srgbClr val="334155"/>
+            </a:solidFill>
+          </a:ln>
+        </p:spPr>
+        <p:style>
+          <a:lnRef idx="1">
+            <a:schemeClr val="accent1"/>
+          </a:lnRef>
+          <a:fillRef idx="3">
+            <a:schemeClr val="accent1"/>
+          </a:fillRef>
+          <a:effectRef idx="2">
+            <a:schemeClr val="accent1"/>
+          </a:effectRef>
+          <a:fontRef idx="minor">
+            <a:schemeClr val="lt1"/>
+          </a:fontRef>
+        </p:style>
+        <p:txBody>
+          <a:bodyPr rtlCol="0" anchor="ctr"/>
+          <a:lstStyle/>
+          <a:p>
+            <a:pPr algn="ctr"/>
+            <a:endParaRPr/>
+          </a:p>
+        </p:txBody>
+      </p:sp>
+      <p:sp>
+        <p:nvSpPr>
+          <p:cNvPr id="5" name="TextBox 4"/>
+          <p:cNvSpPr txBox="1"/>
+          <p:nvPr/>
+        </p:nvSpPr>
+        <p:spPr>
+          <a:xfrm>
+            <a:off x="1005840" y="1965960"/>
+            <a:ext cx="4572000" cy="1371600"/>
+          </a:xfrm>
+          <a:prstGeom prst="rect">
+            <a:avLst/>
+          </a:prstGeom>
+          <a:noFill/>
+        </p:spPr>
+        <p:txBody>
+          <a:bodyPr wrap="square">
+            <a:spAutoFit/>
+          </a:bodyPr>
+          <a:lstStyle/>
+          <a:p>
+            <a:pPr>
+              <a:spcAft>
+                <a:spcPts val="600"/>
+              </a:spcAft>
+              <a:defRPr sz="1400" b="1">
+                <a:solidFill>
+                  <a:srgbClr val="FFFFFF"/>
+                </a:solidFill>
+              </a:defRPr>
+            </a:pPr>
+            <a:r>
+              <a:t>🚀 সেন্ট্রাল হেডকোয়ার্টার ভিজিবিলিটি</a:t>
+            </a:r>
+          </a:p>
+          <a:p>
+            <a:pPr>
+              <a:spcAft>
+                <a:spcPts val="200"/>
+              </a:spcAft>
+              <a:defRPr sz="1100">
+                <a:solidFill>
+                  <a:srgbClr val="94A3B8"/>
+                </a:solidFill>
+              </a:defRPr>
+            </a:pPr>
+            <a:r>
+              <a:t>প্রধান অ্যাডমিন অফিসে বসেই ১০টি টার্মিনালের সকল বাসের অবস্থান ও খালি সিটের রিয়েল-টাইম তথ্য পাচ্ছেন।</a:t>
+            </a:r>
+          </a:p>
+        </p:txBody>
+      </p:sp>
+      <p:sp>
+        <p:nvSpPr>
+          <p:cNvPr id="6" name="Rounded Rectangle 5"/>
+          <p:cNvSpPr/>
+          <p:nvPr/>
+        </p:nvSpPr>
+        <p:spPr>
+          <a:xfrm>
+            <a:off x="6126480" y="1737360"/>
+            <a:ext cx="5120640" cy="1828800"/>
+          </a:xfrm>
+          <a:prstGeom prst="roundRect">
+            <a:avLst/>
+          </a:prstGeom>
+          <a:solidFill>
+            <a:srgbClr val="1E293B"/>
+          </a:solidFill>
+          <a:ln>
+            <a:solidFill>
+              <a:srgbClr val="334155"/>
+            </a:solidFill>
+          </a:ln>
+        </p:spPr>
+        <p:style>
+          <a:lnRef idx="1">
+            <a:schemeClr val="accent1"/>
+          </a:lnRef>
+          <a:fillRef idx="3">
+            <a:schemeClr val="accent1"/>
+          </a:fillRef>
+          <a:effectRef idx="2">
+            <a:schemeClr val="accent1"/>
+          </a:effectRef>
+          <a:fontRef idx="minor">
+            <a:schemeClr val="lt1"/>
+          </a:fontRef>
+        </p:style>
+        <p:txBody>
+          <a:bodyPr rtlCol="0" anchor="ctr"/>
+          <a:lstStyle/>
+          <a:p>
+            <a:pPr algn="ctr"/>
+            <a:endParaRPr/>
+          </a:p>
+        </p:txBody>
+      </p:sp>
+      <p:sp>
+        <p:nvSpPr>
+          <p:cNvPr id="7" name="TextBox 6"/>
+          <p:cNvSpPr txBox="1"/>
+          <p:nvPr/>
+        </p:nvSpPr>
+        <p:spPr>
+          <a:xfrm>
+            <a:off x="6400800" y="1965960"/>
+            <a:ext cx="4572000" cy="1371600"/>
+          </a:xfrm>
+          <a:prstGeom prst="rect">
+            <a:avLst/>
+          </a:prstGeom>
+          <a:noFill/>
+        </p:spPr>
+        <p:txBody>
+          <a:bodyPr wrap="square">
+            <a:spAutoFit/>
+          </a:bodyPr>
+          <a:lstStyle/>
+          <a:p>
+            <a:pPr>
+              <a:spcAft>
+                <a:spcPts val="600"/>
+              </a:spcAft>
+              <a:defRPr sz="1400" b="1">
+                <a:solidFill>
+                  <a:srgbClr val="FFFFFF"/>
+                </a:solidFill>
+              </a:defRPr>
+            </a:pPr>
+            <a:r>
+              <a:t>⚡ টার্মিনালগুলোর বিকেন্দ্রীভূত স্বাধীনতা</a:t>
+            </a:r>
+          </a:p>
+          <a:p>
+            <a:pPr>
+              <a:spcAft>
+                <a:spcPts val="200"/>
+              </a:spcAft>
+              <a:defRPr sz="1100">
+                <a:solidFill>
+                  <a:srgbClr val="94A3B8"/>
+                </a:solidFill>
+              </a:defRPr>
+            </a:pPr>
+            <a:r>
+              <a:t>১০টি কাউন্টারের সেলস টিম স্বাধীনভাবে তাদের বাসের শিডিউল ম্যানেজ ও দ্রুত টিকেট বুকিং করতে পারছে।</a:t>
+            </a:r>
+          </a:p>
+        </p:txBody>
+      </p:sp>
+      <p:sp>
+        <p:nvSpPr>
+          <p:cNvPr id="8" name="Rounded Rectangle 7"/>
+          <p:cNvSpPr/>
+          <p:nvPr/>
+        </p:nvSpPr>
+        <p:spPr>
+          <a:xfrm>
+            <a:off x="731520" y="3840479"/>
+            <a:ext cx="5120640" cy="1828800"/>
+          </a:xfrm>
+          <a:prstGeom prst="roundRect">
+            <a:avLst/>
+          </a:prstGeom>
+          <a:solidFill>
+            <a:srgbClr val="1E293B"/>
+          </a:solidFill>
+          <a:ln>
+            <a:solidFill>
+              <a:srgbClr val="334155"/>
+            </a:solidFill>
+          </a:ln>
+        </p:spPr>
+        <p:style>
+          <a:lnRef idx="1">
+            <a:schemeClr val="accent1"/>
+          </a:lnRef>
+          <a:fillRef idx="3">
+            <a:schemeClr val="accent1"/>
+          </a:fillRef>
+          <a:effectRef idx="2">
+            <a:schemeClr val="accent1"/>
+          </a:effectRef>
+          <a:fontRef idx="minor">
+            <a:schemeClr val="lt1"/>
+          </a:fontRef>
+        </p:style>
+        <p:txBody>
+          <a:bodyPr rtlCol="0" anchor="ctr"/>
+          <a:lstStyle/>
+          <a:p>
+            <a:pPr algn="ctr"/>
+            <a:endParaRPr/>
+          </a:p>
+        </p:txBody>
+      </p:sp>
+      <p:sp>
+        <p:nvSpPr>
+          <p:cNvPr id="9" name="TextBox 8"/>
+          <p:cNvSpPr txBox="1"/>
+          <p:nvPr/>
+        </p:nvSpPr>
+        <p:spPr>
+          <a:xfrm>
+            <a:off x="1005840" y="4069079"/>
+            <a:ext cx="4572000" cy="1371600"/>
+          </a:xfrm>
+          <a:prstGeom prst="rect">
+            <a:avLst/>
+          </a:prstGeom>
+          <a:noFill/>
+        </p:spPr>
+        <p:txBody>
+          <a:bodyPr wrap="square">
+            <a:spAutoFit/>
+          </a:bodyPr>
+          <a:lstStyle/>
+          <a:p>
+            <a:pPr>
+              <a:spcAft>
+                <a:spcPts val="600"/>
+              </a:spcAft>
+              <a:defRPr sz="1400" b="1">
+                <a:solidFill>
+                  <a:srgbClr val="FFFFFF"/>
+                </a:solidFill>
+              </a:defRPr>
+            </a:pPr>
+            <a:r>
+              <a:t>💰 আয় ও ব্যয়ের শতভাগ স্বচ্ছতা</a:t>
+            </a:r>
+          </a:p>
+          <a:p>
+            <a:pPr>
+              <a:spcAft>
+                <a:spcPts val="200"/>
+              </a:spcAft>
+              <a:defRPr sz="1100">
+                <a:solidFill>
+                  <a:srgbClr val="94A3B8"/>
+                </a:solidFill>
+              </a:defRPr>
+            </a:pPr>
+            <a:r>
+              <a:t>প্রতিটি লিটার ফুয়েল, ব্রিজ টোল ও পার্সেল ইনকাম ভাউচারসহ অডিট হওয়ায় আর্থিক অপচয় বা তছরুপ বন্ধ।</a:t>
+            </a:r>
+          </a:p>
+        </p:txBody>
+      </p:sp>
+      <p:sp>
+        <p:nvSpPr>
+          <p:cNvPr id="10" name="Rounded Rectangle 9"/>
+          <p:cNvSpPr/>
+          <p:nvPr/>
+        </p:nvSpPr>
+        <p:spPr>
+          <a:xfrm>
+            <a:off x="6126480" y="3840479"/>
+            <a:ext cx="5120640" cy="1828800"/>
+          </a:xfrm>
+          <a:prstGeom prst="roundRect">
+            <a:avLst/>
+          </a:prstGeom>
+          <a:solidFill>
+            <a:srgbClr val="1E293B"/>
+          </a:solidFill>
+          <a:ln>
+            <a:solidFill>
+              <a:srgbClr val="334155"/>
+            </a:solidFill>
+          </a:ln>
+        </p:spPr>
+        <p:style>
+          <a:lnRef idx="1">
+            <a:schemeClr val="accent1"/>
+          </a:lnRef>
+          <a:fillRef idx="3">
+            <a:schemeClr val="accent1"/>
+          </a:fillRef>
+          <a:effectRef idx="2">
+            <a:schemeClr val="accent1"/>
+          </a:effectRef>
+          <a:fontRef idx="minor">
+            <a:schemeClr val="lt1"/>
+          </a:fontRef>
+        </p:style>
+        <p:txBody>
+          <a:bodyPr rtlCol="0" anchor="ctr"/>
+          <a:lstStyle/>
+          <a:p>
+            <a:pPr algn="ctr"/>
+            <a:endParaRPr/>
+          </a:p>
+        </p:txBody>
+      </p:sp>
+      <p:sp>
+        <p:nvSpPr>
+          <p:cNvPr id="11" name="TextBox 10"/>
+          <p:cNvSpPr txBox="1"/>
+          <p:nvPr/>
+        </p:nvSpPr>
+        <p:spPr>
+          <a:xfrm>
+            <a:off x="6400800" y="4069079"/>
+            <a:ext cx="4572000" cy="1371600"/>
+          </a:xfrm>
+          <a:prstGeom prst="rect">
+            <a:avLst/>
+          </a:prstGeom>
+          <a:noFill/>
+        </p:spPr>
+        <p:txBody>
+          <a:bodyPr wrap="square">
+            <a:spAutoFit/>
+          </a:bodyPr>
+          <a:lstStyle/>
+          <a:p>
+            <a:pPr>
+              <a:spcAft>
+                <a:spcPts val="600"/>
+              </a:spcAft>
+              <a:defRPr sz="1400" b="1">
+                <a:solidFill>
+                  <a:srgbClr val="FFFFFF"/>
+                </a:solidFill>
+              </a:defRPr>
+            </a:pPr>
+            <a:r>
+              <a:t>💻 জিরো সার্ভার ওভারহেড ও দ্রুত গতি</a:t>
+            </a:r>
+          </a:p>
+          <a:p>
+            <a:pPr>
+              <a:spcAft>
+                <a:spcPts val="200"/>
+              </a:spcAft>
+              <a:defRPr sz="1100">
+                <a:solidFill>
+                  <a:srgbClr val="94A3B8"/>
+                </a:solidFill>
+              </a:defRPr>
+            </a:pPr>
+            <a:r>
+              <a:t>Tailwind CSS ও আধুনিক ব্রাউজার-ফার্স্ট আর্কিটেকচারে তৈরি, কোনো জটিল ব্যাকএন্ড ছাড়াও অত্যন্ত দ্রুতগতিতে কাজ করে।</a:t>
+            </a:r>
+          </a:p>
+        </p:txBody>
+      </p:sp>
+    </p:spTree>
+  </p:cSld>
+  <p:clrMapOvr>
+    <a:masterClrMapping/>
+  </p:clrMapOvr>
+</p:sld>
+</file>
+
+<file path=ppt/slides/slide11.xml><?xml version="1.0" encoding="utf-8"?>
+<p:sld xmlns:a="http://schemas.openxmlformats.org/drawingml/2006/main" xmlns:r="http://schemas.openxmlformats.org/officeDocument/2006/relationships" xmlns:p="http://schemas.openxmlformats.org/presentationml/2006/main">
+  <p:cSld>
+    <p:spTree>
+      <p:nvGrpSpPr>
+        <p:cNvPr id="1" name=""/>
+        <p:cNvGrpSpPr/>
+        <p:nvPr/>
+      </p:nvGrpSpPr>
+      <p:grpSpPr>
+        <a:xfrm>
+          <a:off x="0" y="0"/>
+          <a:ext cx="0" cy="0"/>
+          <a:chOff x="0" y="0"/>
+          <a:chExt cx="0" cy="0"/>
+        </a:xfrm>
+      </p:grpSpPr>
       <p:sp>
         <p:nvSpPr>
           <p:cNvPr id="2" name="Rectangle 1"/>
@@ -3776,6 +4340,7 @@
           <a:lstStyle/>
           <a:p>
             <a:pPr algn="ctr"/>
+            <a:endParaRPr/>
           </a:p>
         </p:txBody>
       </p:sp>
@@ -3883,6 +4448,7 @@
           <a:lstStyle/>
           <a:p>
             <a:pPr algn="ctr"/>
+            <a:endParaRPr/>
           </a:p>
         </p:txBody>
       </p:sp>
@@ -4170,6 +4736,7 @@
           <a:lstStyle/>
           <a:p>
             <a:pPr algn="ctr"/>
+            <a:endParaRPr/>
           </a:p>
         </p:txBody>
       </p:sp>
@@ -4457,6 +5024,7 @@
           <a:lstStyle/>
           <a:p>
             <a:pPr algn="ctr"/>
+            <a:endParaRPr/>
           </a:p>
         </p:txBody>
       </p:sp>
@@ -4547,7 +5115,7 @@
               </a:defRPr>
             </a:pPr>
             <a:r>
-              <a:t>RBAC Roles &amp; POS Engine</a:t>
+              <a:t>RBAC Roles &amp; Accounting</a:t>
             </a:r>
           </a:p>
           <a:p>
@@ -4562,7 +5130,7 @@
               </a:defRPr>
             </a:pPr>
             <a:r>
-              <a:t>২য় মাস • রোল ও বুকিং ইঞ্জিন</a:t>
+              <a:t>২য় মাস • রোল ও আয়-ব্যয় ইঞ্জিন</a:t>
             </a:r>
           </a:p>
           <a:p>
@@ -4601,6 +5169,33 @@
               </a:defRPr>
             </a:pPr>
             <a:r>
+              <a:t>💰 Income &amp; Expense Cashbook</a:t>
+            </a:r>
+          </a:p>
+          <a:p>
+            <a:pPr>
+              <a:spcAft>
+                <a:spcPts val="400"/>
+              </a:spcAft>
+              <a:defRPr sz="850">
+                <a:solidFill>
+                  <a:srgbClr val="64748B"/>
+                </a:solidFill>
+              </a:defRPr>
+            </a:pPr>
+            <a:r>
+              <a:t>ডিজেল, টোল, পার্সেল ও কাউন্টার ক্যাশ ট্র্যাকিং।</a:t>
+            </a:r>
+          </a:p>
+          <a:p>
+            <a:pPr>
+              <a:defRPr sz="950" b="1">
+                <a:solidFill>
+                  <a:srgbClr val="0F172A"/>
+                </a:solidFill>
+              </a:defRPr>
+            </a:pPr>
+            <a:r>
               <a:t>🎫 POS Ticket Generator</a:t>
             </a:r>
           </a:p>
@@ -4655,7 +5250,7 @@
               </a:defRPr>
             </a:pPr>
             <a:r>
-              <a:t>💰 Daily Revenue Accounting</a:t>
+              <a:t>📊 Financial Margin Audit</a:t>
             </a:r>
           </a:p>
           <a:p>
@@ -4670,34 +5265,7 @@
               </a:defRPr>
             </a:pPr>
             <a:r>
-              <a:t>১০টি কাউন্টারভিত্তিক ক্যাশ ও বিক্রির হিসেব।</a:t>
-            </a:r>
-          </a:p>
-          <a:p>
-            <a:pPr>
-              <a:defRPr sz="950" b="1">
-                <a:solidFill>
-                  <a:srgbClr val="0F172A"/>
-                </a:solidFill>
-              </a:defRPr>
-            </a:pPr>
-            <a:r>
-              <a:t>📋 Passenger Manifest Export</a:t>
-            </a:r>
-          </a:p>
-          <a:p>
-            <a:pPr>
-              <a:spcAft>
-                <a:spcPts val="400"/>
-              </a:spcAft>
-              <a:defRPr sz="850">
-                <a:solidFill>
-                  <a:srgbClr val="64748B"/>
-                </a:solidFill>
-              </a:defRPr>
-            </a:pPr>
-            <a:r>
-              <a:t>বাস সুপারভাইজারের জন্য প্যাসেঞ্জার শিট তৈরি।</a:t>
+              <a:t>টার্মিনালভিত্তিক মুনাফা ও গ্রস মার্জিন অ্যানালিটিক্স।</a:t>
             </a:r>
           </a:p>
         </p:txBody>
@@ -4744,6 +5312,7 @@
           <a:lstStyle/>
           <a:p>
             <a:pPr algn="ctr"/>
+            <a:endParaRPr/>
           </a:p>
         </p:txBody>
       </p:sp>
@@ -5051,8 +5620,8 @@
 </p:sld>
 </file>
 
-<file path=ppt/slides/slide11.xml><?xml version="1.0" encoding="utf-8"?>
-<p:sld xmlns:a="http://schemas.openxmlformats.org/drawingml/2006/main" xmlns:p="http://schemas.openxmlformats.org/presentationml/2006/main" xmlns:r="http://schemas.openxmlformats.org/officeDocument/2006/relationships">
+<file path=ppt/slides/slide12.xml><?xml version="1.0" encoding="utf-8"?>
+<p:sld xmlns:a="http://schemas.openxmlformats.org/drawingml/2006/main" xmlns:r="http://schemas.openxmlformats.org/officeDocument/2006/relationships" xmlns:p="http://schemas.openxmlformats.org/presentationml/2006/main">
   <p:cSld>
     <p:spTree>
       <p:nvGrpSpPr>
@@ -5060,7 +5629,14 @@
         <p:cNvGrpSpPr/>
         <p:nvPr/>
       </p:nvGrpSpPr>
-      <p:grpSpPr/>
+      <p:grpSpPr>
+        <a:xfrm>
+          <a:off x="0" y="0"/>
+          <a:ext cx="0" cy="0"/>
+          <a:chOff x="0" y="0"/>
+          <a:chExt cx="0" cy="0"/>
+        </a:xfrm>
+      </p:grpSpPr>
       <p:sp>
         <p:nvSpPr>
           <p:cNvPr id="2" name="Rectangle 1"/>
@@ -5101,6 +5677,7 @@
           <a:lstStyle/>
           <a:p>
             <a:pPr algn="ctr"/>
+            <a:endParaRPr/>
           </a:p>
         </p:txBody>
       </p:sp>
@@ -5146,6 +5723,7 @@
           <a:lstStyle/>
           <a:p>
             <a:pPr algn="ctr"/>
+            <a:endParaRPr/>
           </a:p>
         </p:txBody>
       </p:sp>
@@ -5268,7 +5846,7 @@
 </file>
 
 <file path=ppt/slides/slide2.xml><?xml version="1.0" encoding="utf-8"?>
-<p:sld xmlns:a="http://schemas.openxmlformats.org/drawingml/2006/main" xmlns:p="http://schemas.openxmlformats.org/presentationml/2006/main" xmlns:r="http://schemas.openxmlformats.org/officeDocument/2006/relationships">
+<p:sld xmlns:a="http://schemas.openxmlformats.org/drawingml/2006/main" xmlns:r="http://schemas.openxmlformats.org/officeDocument/2006/relationships" xmlns:p="http://schemas.openxmlformats.org/presentationml/2006/main">
   <p:cSld>
     <p:spTree>
       <p:nvGrpSpPr>
@@ -5276,7 +5854,14 @@
         <p:cNvGrpSpPr/>
         <p:nvPr/>
       </p:nvGrpSpPr>
-      <p:grpSpPr/>
+      <p:grpSpPr>
+        <a:xfrm>
+          <a:off x="0" y="0"/>
+          <a:ext cx="0" cy="0"/>
+          <a:chOff x="0" y="0"/>
+          <a:chExt cx="0" cy="0"/>
+        </a:xfrm>
+      </p:grpSpPr>
       <p:sp>
         <p:nvSpPr>
           <p:cNvPr id="2" name="Rectangle 1"/>
@@ -5317,6 +5902,7 @@
           <a:lstStyle/>
           <a:p>
             <a:pPr algn="ctr"/>
+            <a:endParaRPr/>
           </a:p>
         </p:txBody>
       </p:sp>
@@ -5424,6 +6010,7 @@
           <a:lstStyle/>
           <a:p>
             <a:pPr algn="ctr"/>
+            <a:endParaRPr/>
           </a:p>
         </p:txBody>
       </p:sp>
@@ -5546,6 +6133,7 @@
           <a:lstStyle/>
           <a:p>
             <a:pPr algn="ctr"/>
+            <a:endParaRPr/>
           </a:p>
         </p:txBody>
       </p:sp>
@@ -5668,6 +6256,7 @@
           <a:lstStyle/>
           <a:p>
             <a:pPr algn="ctr"/>
+            <a:endParaRPr/>
           </a:p>
         </p:txBody>
       </p:sp>
@@ -5790,6 +6379,7 @@
           <a:lstStyle/>
           <a:p>
             <a:pPr algn="ctr"/>
+            <a:endParaRPr/>
           </a:p>
         </p:txBody>
       </p:sp>
@@ -5912,6 +6502,7 @@
           <a:lstStyle/>
           <a:p>
             <a:pPr algn="ctr"/>
+            <a:endParaRPr/>
           </a:p>
         </p:txBody>
       </p:sp>
@@ -6034,6 +6625,7 @@
           <a:lstStyle/>
           <a:p>
             <a:pPr algn="ctr"/>
+            <a:endParaRPr/>
           </a:p>
         </p:txBody>
       </p:sp>
@@ -6156,6 +6748,7 @@
           <a:lstStyle/>
           <a:p>
             <a:pPr algn="ctr"/>
+            <a:endParaRPr/>
           </a:p>
         </p:txBody>
       </p:sp>
@@ -6278,6 +6871,7 @@
           <a:lstStyle/>
           <a:p>
             <a:pPr algn="ctr"/>
+            <a:endParaRPr/>
           </a:p>
         </p:txBody>
       </p:sp>
@@ -6400,6 +6994,7 @@
           <a:lstStyle/>
           <a:p>
             <a:pPr algn="ctr"/>
+            <a:endParaRPr/>
           </a:p>
         </p:txBody>
       </p:sp>
@@ -6522,6 +7117,7 @@
           <a:lstStyle/>
           <a:p>
             <a:pPr algn="ctr"/>
+            <a:endParaRPr/>
           </a:p>
         </p:txBody>
       </p:sp>
@@ -6665,7 +7261,7 @@
 </file>
 
 <file path=ppt/slides/slide3.xml><?xml version="1.0" encoding="utf-8"?>
-<p:sld xmlns:a="http://schemas.openxmlformats.org/drawingml/2006/main" xmlns:p="http://schemas.openxmlformats.org/presentationml/2006/main" xmlns:r="http://schemas.openxmlformats.org/officeDocument/2006/relationships">
+<p:sld xmlns:a="http://schemas.openxmlformats.org/drawingml/2006/main" xmlns:r="http://schemas.openxmlformats.org/officeDocument/2006/relationships" xmlns:p="http://schemas.openxmlformats.org/presentationml/2006/main">
   <p:cSld>
     <p:spTree>
       <p:nvGrpSpPr>
@@ -6673,7 +7269,14 @@
         <p:cNvGrpSpPr/>
         <p:nvPr/>
       </p:nvGrpSpPr>
-      <p:grpSpPr/>
+      <p:grpSpPr>
+        <a:xfrm>
+          <a:off x="0" y="0"/>
+          <a:ext cx="0" cy="0"/>
+          <a:chOff x="0" y="0"/>
+          <a:chExt cx="0" cy="0"/>
+        </a:xfrm>
+      </p:grpSpPr>
       <p:sp>
         <p:nvSpPr>
           <p:cNvPr id="2" name="Rectangle 1"/>
@@ -6714,6 +7317,7 @@
           <a:lstStyle/>
           <a:p>
             <a:pPr algn="ctr"/>
+            <a:endParaRPr/>
           </a:p>
         </p:txBody>
       </p:sp>
@@ -6985,7 +7589,7 @@
 </file>
 
 <file path=ppt/slides/slide4.xml><?xml version="1.0" encoding="utf-8"?>
-<p:sld xmlns:a="http://schemas.openxmlformats.org/drawingml/2006/main" xmlns:p="http://schemas.openxmlformats.org/presentationml/2006/main" xmlns:r="http://schemas.openxmlformats.org/officeDocument/2006/relationships">
+<p:sld xmlns:a="http://schemas.openxmlformats.org/drawingml/2006/main" xmlns:r="http://schemas.openxmlformats.org/officeDocument/2006/relationships" xmlns:p="http://schemas.openxmlformats.org/presentationml/2006/main">
   <p:cSld>
     <p:spTree>
       <p:nvGrpSpPr>
@@ -6993,7 +7597,14 @@
         <p:cNvGrpSpPr/>
         <p:nvPr/>
       </p:nvGrpSpPr>
-      <p:grpSpPr/>
+      <p:grpSpPr>
+        <a:xfrm>
+          <a:off x="0" y="0"/>
+          <a:ext cx="0" cy="0"/>
+          <a:chOff x="0" y="0"/>
+          <a:chExt cx="0" cy="0"/>
+        </a:xfrm>
+      </p:grpSpPr>
       <p:sp>
         <p:nvSpPr>
           <p:cNvPr id="2" name="Rectangle 1"/>
@@ -7034,6 +7645,7 @@
           <a:lstStyle/>
           <a:p>
             <a:pPr algn="ctr"/>
+            <a:endParaRPr/>
           </a:p>
         </p:txBody>
       </p:sp>
@@ -7305,7 +7917,7 @@
 </file>
 
 <file path=ppt/slides/slide5.xml><?xml version="1.0" encoding="utf-8"?>
-<p:sld xmlns:a="http://schemas.openxmlformats.org/drawingml/2006/main" xmlns:p="http://schemas.openxmlformats.org/presentationml/2006/main" xmlns:r="http://schemas.openxmlformats.org/officeDocument/2006/relationships">
+<p:sld xmlns:a="http://schemas.openxmlformats.org/drawingml/2006/main" xmlns:r="http://schemas.openxmlformats.org/officeDocument/2006/relationships" xmlns:p="http://schemas.openxmlformats.org/presentationml/2006/main">
   <p:cSld>
     <p:spTree>
       <p:nvGrpSpPr>
@@ -7313,7 +7925,14 @@
         <p:cNvGrpSpPr/>
         <p:nvPr/>
       </p:nvGrpSpPr>
-      <p:grpSpPr/>
+      <p:grpSpPr>
+        <a:xfrm>
+          <a:off x="0" y="0"/>
+          <a:ext cx="0" cy="0"/>
+          <a:chOff x="0" y="0"/>
+          <a:chExt cx="0" cy="0"/>
+        </a:xfrm>
+      </p:grpSpPr>
       <p:sp>
         <p:nvSpPr>
           <p:cNvPr id="2" name="Rectangle 1"/>
@@ -7354,6 +7973,7 @@
           <a:lstStyle/>
           <a:p>
             <a:pPr algn="ctr"/>
+            <a:endParaRPr/>
           </a:p>
         </p:txBody>
       </p:sp>
@@ -7625,7 +8245,7 @@
 </file>
 
 <file path=ppt/slides/slide6.xml><?xml version="1.0" encoding="utf-8"?>
-<p:sld xmlns:a="http://schemas.openxmlformats.org/drawingml/2006/main" xmlns:p="http://schemas.openxmlformats.org/presentationml/2006/main" xmlns:r="http://schemas.openxmlformats.org/officeDocument/2006/relationships">
+<p:sld xmlns:a="http://schemas.openxmlformats.org/drawingml/2006/main" xmlns:r="http://schemas.openxmlformats.org/officeDocument/2006/relationships" xmlns:p="http://schemas.openxmlformats.org/presentationml/2006/main">
   <p:cSld>
     <p:spTree>
       <p:nvGrpSpPr>
@@ -7633,7 +8253,14 @@
         <p:cNvGrpSpPr/>
         <p:nvPr/>
       </p:nvGrpSpPr>
-      <p:grpSpPr/>
+      <p:grpSpPr>
+        <a:xfrm>
+          <a:off x="0" y="0"/>
+          <a:ext cx="0" cy="0"/>
+          <a:chOff x="0" y="0"/>
+          <a:chExt cx="0" cy="0"/>
+        </a:xfrm>
+      </p:grpSpPr>
       <p:sp>
         <p:nvSpPr>
           <p:cNvPr id="2" name="Rectangle 1"/>
@@ -7674,6 +8301,7 @@
           <a:lstStyle/>
           <a:p>
             <a:pPr algn="ctr"/>
+            <a:endParaRPr/>
           </a:p>
         </p:txBody>
       </p:sp>
@@ -7945,7 +8573,7 @@
 </file>
 
 <file path=ppt/slides/slide7.xml><?xml version="1.0" encoding="utf-8"?>
-<p:sld xmlns:a="http://schemas.openxmlformats.org/drawingml/2006/main" xmlns:p="http://schemas.openxmlformats.org/presentationml/2006/main" xmlns:r="http://schemas.openxmlformats.org/officeDocument/2006/relationships">
+<p:sld xmlns:a="http://schemas.openxmlformats.org/drawingml/2006/main" xmlns:r="http://schemas.openxmlformats.org/officeDocument/2006/relationships" xmlns:p="http://schemas.openxmlformats.org/presentationml/2006/main">
   <p:cSld>
     <p:spTree>
       <p:nvGrpSpPr>
@@ -7953,7 +8581,14 @@
         <p:cNvGrpSpPr/>
         <p:nvPr/>
       </p:nvGrpSpPr>
-      <p:grpSpPr/>
+      <p:grpSpPr>
+        <a:xfrm>
+          <a:off x="0" y="0"/>
+          <a:ext cx="0" cy="0"/>
+          <a:chOff x="0" y="0"/>
+          <a:chExt cx="0" cy="0"/>
+        </a:xfrm>
+      </p:grpSpPr>
       <p:sp>
         <p:nvSpPr>
           <p:cNvPr id="2" name="Rectangle 1"/>
@@ -7994,6 +8629,7 @@
           <a:lstStyle/>
           <a:p>
             <a:pPr algn="ctr"/>
+            <a:endParaRPr/>
           </a:p>
         </p:txBody>
       </p:sp>
@@ -8265,7 +8901,7 @@
 </file>
 
 <file path=ppt/slides/slide8.xml><?xml version="1.0" encoding="utf-8"?>
-<p:sld xmlns:a="http://schemas.openxmlformats.org/drawingml/2006/main" xmlns:p="http://schemas.openxmlformats.org/presentationml/2006/main" xmlns:r="http://schemas.openxmlformats.org/officeDocument/2006/relationships">
+<p:sld xmlns:a="http://schemas.openxmlformats.org/drawingml/2006/main" xmlns:r="http://schemas.openxmlformats.org/officeDocument/2006/relationships" xmlns:p="http://schemas.openxmlformats.org/presentationml/2006/main">
   <p:cSld>
     <p:spTree>
       <p:nvGrpSpPr>
@@ -8273,7 +8909,14 @@
         <p:cNvGrpSpPr/>
         <p:nvPr/>
       </p:nvGrpSpPr>
-      <p:grpSpPr/>
+      <p:grpSpPr>
+        <a:xfrm>
+          <a:off x="0" y="0"/>
+          <a:ext cx="0" cy="0"/>
+          <a:chOff x="0" y="0"/>
+          <a:chExt cx="0" cy="0"/>
+        </a:xfrm>
+      </p:grpSpPr>
       <p:sp>
         <p:nvSpPr>
           <p:cNvPr id="2" name="Rectangle 1"/>
@@ -8314,6 +8957,7 @@
           <a:lstStyle/>
           <a:p>
             <a:pPr algn="ctr"/>
+            <a:endParaRPr/>
           </a:p>
         </p:txBody>
       </p:sp>
@@ -8411,8 +9055,8 @@
         </p:nvSpPr>
         <p:spPr>
           <a:xfrm>
-            <a:off x="5669280" y="1645920"/>
-            <a:ext cx="5760720" cy="4572000"/>
+            <a:off x="8273142" y="1645920"/>
+            <a:ext cx="3156857" cy="3803605"/>
           </a:xfrm>
           <a:prstGeom prst="rect">
             <a:avLst/>
@@ -8436,7 +9080,40 @@
               </a:defRPr>
             </a:pPr>
             <a:r>
-              <a:t>🎫 স্বয়ংক্রিয় ইউনিক টিকেট নম্বর (e.g. TKT-7821)</a:t>
+              <a:rPr dirty="0"/>
+              <a:t>🎫 </a:t>
+            </a:r>
+            <a:r>
+              <a:rPr dirty="0" err="1"/>
+              <a:t>স্বয়ংক্রিয়</a:t>
+            </a:r>
+            <a:r>
+              <a:rPr dirty="0"/>
+              <a:t> </a:t>
+            </a:r>
+            <a:r>
+              <a:rPr dirty="0" err="1"/>
+              <a:t>ইউনিক</a:t>
+            </a:r>
+            <a:r>
+              <a:rPr dirty="0"/>
+              <a:t> </a:t>
+            </a:r>
+            <a:r>
+              <a:rPr dirty="0" err="1"/>
+              <a:t>টিকেট</a:t>
+            </a:r>
+            <a:r>
+              <a:rPr dirty="0"/>
+              <a:t> </a:t>
+            </a:r>
+            <a:r>
+              <a:rPr dirty="0" err="1"/>
+              <a:t>নম্বর</a:t>
+            </a:r>
+            <a:r>
+              <a:rPr dirty="0"/>
+              <a:t> (e.g. TKT-7821)</a:t>
             </a:r>
           </a:p>
           <a:p>
@@ -8451,7 +9128,76 @@
               </a:defRPr>
             </a:pPr>
             <a:r>
-              <a:t>প্রতিটি সফল বুকিংয়ে স্বয়ংক্রিয়ভাবে অদ্বিতীয় টিকেট আইডি তৈরি হয়।</a:t>
+              <a:rPr dirty="0" err="1"/>
+              <a:t>প্রতিটি</a:t>
+            </a:r>
+            <a:r>
+              <a:rPr dirty="0"/>
+              <a:t> </a:t>
+            </a:r>
+            <a:r>
+              <a:rPr dirty="0" err="1"/>
+              <a:t>সফল</a:t>
+            </a:r>
+            <a:r>
+              <a:rPr dirty="0"/>
+              <a:t> </a:t>
+            </a:r>
+            <a:r>
+              <a:rPr dirty="0" err="1"/>
+              <a:t>বুকিংয়ে</a:t>
+            </a:r>
+            <a:r>
+              <a:rPr dirty="0"/>
+              <a:t> </a:t>
+            </a:r>
+            <a:r>
+              <a:rPr dirty="0" err="1"/>
+              <a:t>স্বয়ংক্রিয়ভাবে</a:t>
+            </a:r>
+            <a:r>
+              <a:rPr dirty="0"/>
+              <a:t> </a:t>
+            </a:r>
+            <a:r>
+              <a:rPr dirty="0" err="1"/>
+              <a:t>অদ্বিতীয়</a:t>
+            </a:r>
+            <a:r>
+              <a:rPr dirty="0"/>
+              <a:t> </a:t>
+            </a:r>
+            <a:r>
+              <a:rPr dirty="0" err="1"/>
+              <a:t>টিকেট</a:t>
+            </a:r>
+            <a:r>
+              <a:rPr dirty="0"/>
+              <a:t> </a:t>
+            </a:r>
+            <a:r>
+              <a:rPr dirty="0" err="1"/>
+              <a:t>আইডি</a:t>
+            </a:r>
+            <a:r>
+              <a:rPr dirty="0"/>
+              <a:t> </a:t>
+            </a:r>
+            <a:r>
+              <a:rPr dirty="0" err="1"/>
+              <a:t>তৈরি</a:t>
+            </a:r>
+            <a:r>
+              <a:rPr dirty="0"/>
+              <a:t> </a:t>
+            </a:r>
+            <a:r>
+              <a:rPr dirty="0" err="1"/>
+              <a:t>হয়</a:t>
+            </a:r>
+            <a:r>
+              <a:rPr dirty="0"/>
+              <a:t>।</a:t>
             </a:r>
           </a:p>
           <a:p>
@@ -8466,8 +9212,46 @@
               </a:defRPr>
             </a:pPr>
             <a:r>
-              <a:t>📄 সম্পূর্ণ ভ্রমণের বিবরণ সমৃদ্ধ রিসিট</a:t>
-            </a:r>
+              <a:rPr dirty="0"/>
+              <a:t>📄 </a:t>
+            </a:r>
+            <a:r>
+              <a:rPr dirty="0" err="1"/>
+              <a:t>সম্পূর্ণ</a:t>
+            </a:r>
+            <a:r>
+              <a:rPr dirty="0"/>
+              <a:t> </a:t>
+            </a:r>
+            <a:r>
+              <a:rPr dirty="0" err="1"/>
+              <a:t>ভ্রমণের</a:t>
+            </a:r>
+            <a:r>
+              <a:rPr dirty="0"/>
+              <a:t> </a:t>
+            </a:r>
+            <a:r>
+              <a:rPr dirty="0" err="1"/>
+              <a:t>বিবরণ</a:t>
+            </a:r>
+            <a:r>
+              <a:rPr dirty="0"/>
+              <a:t> </a:t>
+            </a:r>
+            <a:r>
+              <a:rPr dirty="0" err="1"/>
+              <a:t>সমৃদ্ধ</a:t>
+            </a:r>
+            <a:r>
+              <a:rPr dirty="0"/>
+              <a:t> </a:t>
+            </a:r>
+            <a:r>
+              <a:rPr dirty="0" err="1"/>
+              <a:t>রিসিট</a:t>
+            </a:r>
+            <a:endParaRPr dirty="0"/>
           </a:p>
           <a:p>
             <a:pPr>
@@ -8481,7 +9265,124 @@
               </a:defRPr>
             </a:pPr>
             <a:r>
-              <a:t>কাউন্টার নাম, বাসের নম্বর, গন্তব্য, ছাড়ার নির্ধারিত সময়, সিট নম্বর এবং ভাড়া পরিষ্কারভাবে মুদ্রিত থাকে।</a:t>
+              <a:rPr dirty="0" err="1"/>
+              <a:t>কাউন্টার</a:t>
+            </a:r>
+            <a:r>
+              <a:rPr dirty="0"/>
+              <a:t> </a:t>
+            </a:r>
+            <a:r>
+              <a:rPr dirty="0" err="1"/>
+              <a:t>নাম</a:t>
+            </a:r>
+            <a:r>
+              <a:rPr dirty="0"/>
+              <a:t>, </a:t>
+            </a:r>
+            <a:r>
+              <a:rPr dirty="0" err="1"/>
+              <a:t>বাসের</a:t>
+            </a:r>
+            <a:r>
+              <a:rPr dirty="0"/>
+              <a:t> </a:t>
+            </a:r>
+            <a:r>
+              <a:rPr dirty="0" err="1"/>
+              <a:t>নম্বর</a:t>
+            </a:r>
+            <a:r>
+              <a:rPr dirty="0"/>
+              <a:t>, </a:t>
+            </a:r>
+            <a:r>
+              <a:rPr dirty="0" err="1"/>
+              <a:t>গন্তব্য</a:t>
+            </a:r>
+            <a:r>
+              <a:rPr dirty="0"/>
+              <a:t>, </a:t>
+            </a:r>
+            <a:r>
+              <a:rPr dirty="0" err="1"/>
+              <a:t>ছাড়ার</a:t>
+            </a:r>
+            <a:r>
+              <a:rPr dirty="0"/>
+              <a:t> </a:t>
+            </a:r>
+            <a:r>
+              <a:rPr dirty="0" err="1"/>
+              <a:t>নির্ধারিত</a:t>
+            </a:r>
+            <a:r>
+              <a:rPr dirty="0"/>
+              <a:t> </a:t>
+            </a:r>
+            <a:r>
+              <a:rPr dirty="0" err="1"/>
+              <a:t>সময়</a:t>
+            </a:r>
+            <a:r>
+              <a:rPr dirty="0"/>
+              <a:t>, </a:t>
+            </a:r>
+            <a:r>
+              <a:rPr dirty="0" err="1"/>
+              <a:t>সিট</a:t>
+            </a:r>
+            <a:r>
+              <a:rPr dirty="0"/>
+              <a:t> </a:t>
+            </a:r>
+            <a:r>
+              <a:rPr dirty="0" err="1"/>
+              <a:t>নম্বর</a:t>
+            </a:r>
+            <a:r>
+              <a:rPr dirty="0"/>
+              <a:t> </a:t>
+            </a:r>
+            <a:r>
+              <a:rPr dirty="0" err="1"/>
+              <a:t>এবং</a:t>
+            </a:r>
+            <a:r>
+              <a:rPr dirty="0"/>
+              <a:t> </a:t>
+            </a:r>
+            <a:r>
+              <a:rPr dirty="0" err="1"/>
+              <a:t>ভাড়া</a:t>
+            </a:r>
+            <a:r>
+              <a:rPr dirty="0"/>
+              <a:t> </a:t>
+            </a:r>
+            <a:r>
+              <a:rPr dirty="0" err="1"/>
+              <a:t>পরিষ্কারভাবে</a:t>
+            </a:r>
+            <a:r>
+              <a:rPr dirty="0"/>
+              <a:t> </a:t>
+            </a:r>
+            <a:r>
+              <a:rPr dirty="0" err="1"/>
+              <a:t>মুদ্রিত</a:t>
+            </a:r>
+            <a:r>
+              <a:rPr dirty="0"/>
+              <a:t> </a:t>
+            </a:r>
+            <a:r>
+              <a:rPr dirty="0" err="1"/>
+              <a:t>থাকে</a:t>
+            </a:r>
+            <a:r>
+              <a:rPr dirty="0"/>
+              <a:t>।</a:t>
             </a:r>
           </a:p>
           <a:p>
@@ -8496,8 +9397,30 @@
               </a:defRPr>
             </a:pPr>
             <a:r>
-              <a:t>🖨️ ১-ক্লিক থার্মাল / পেপার প্রিন্টিং</a:t>
-            </a:r>
+              <a:rPr dirty="0"/>
+              <a:t>🖨️ ১-ক্লিক </a:t>
+            </a:r>
+            <a:r>
+              <a:rPr dirty="0" err="1"/>
+              <a:t>থার্মাল</a:t>
+            </a:r>
+            <a:r>
+              <a:rPr dirty="0"/>
+              <a:t> / </a:t>
+            </a:r>
+            <a:r>
+              <a:rPr dirty="0" err="1"/>
+              <a:t>পেপার</a:t>
+            </a:r>
+            <a:r>
+              <a:rPr dirty="0"/>
+              <a:t> </a:t>
+            </a:r>
+            <a:r>
+              <a:rPr dirty="0" err="1"/>
+              <a:t>প্রিন্টিং</a:t>
+            </a:r>
+            <a:endParaRPr dirty="0"/>
           </a:p>
           <a:p>
             <a:pPr>
@@ -8511,7 +9434,128 @@
               </a:defRPr>
             </a:pPr>
             <a:r>
-              <a:t>'প্রিন্ট করুন' বাটনে ক্লিক করলেই ব্রাউজারের প্রিন্ট ডায়ালগ ওপেন হয় এবং স্লিপ প্রিন্ট হয়ে যায়।</a:t>
+              <a:rPr dirty="0"/>
+              <a:t>'</a:t>
+            </a:r>
+            <a:r>
+              <a:rPr dirty="0" err="1"/>
+              <a:t>প্রিন্ট</a:t>
+            </a:r>
+            <a:r>
+              <a:rPr dirty="0"/>
+              <a:t> </a:t>
+            </a:r>
+            <a:r>
+              <a:rPr dirty="0" err="1"/>
+              <a:t>করুন</a:t>
+            </a:r>
+            <a:r>
+              <a:rPr dirty="0"/>
+              <a:t>' </a:t>
+            </a:r>
+            <a:r>
+              <a:rPr dirty="0" err="1"/>
+              <a:t>বাটনে</a:t>
+            </a:r>
+            <a:r>
+              <a:rPr dirty="0"/>
+              <a:t> </a:t>
+            </a:r>
+            <a:r>
+              <a:rPr dirty="0" err="1"/>
+              <a:t>ক্লিক</a:t>
+            </a:r>
+            <a:r>
+              <a:rPr dirty="0"/>
+              <a:t> </a:t>
+            </a:r>
+            <a:r>
+              <a:rPr dirty="0" err="1"/>
+              <a:t>করলেই</a:t>
+            </a:r>
+            <a:r>
+              <a:rPr dirty="0"/>
+              <a:t> </a:t>
+            </a:r>
+            <a:r>
+              <a:rPr dirty="0" err="1"/>
+              <a:t>ব্রাউজারের</a:t>
+            </a:r>
+            <a:r>
+              <a:rPr dirty="0"/>
+              <a:t> </a:t>
+            </a:r>
+            <a:r>
+              <a:rPr dirty="0" err="1"/>
+              <a:t>প্রিন্ট</a:t>
+            </a:r>
+            <a:r>
+              <a:rPr dirty="0"/>
+              <a:t> </a:t>
+            </a:r>
+            <a:r>
+              <a:rPr dirty="0" err="1"/>
+              <a:t>ডায়ালগ</a:t>
+            </a:r>
+            <a:r>
+              <a:rPr dirty="0"/>
+              <a:t> </a:t>
+            </a:r>
+            <a:r>
+              <a:rPr dirty="0" err="1"/>
+              <a:t>ওপেন</a:t>
+            </a:r>
+            <a:r>
+              <a:rPr dirty="0"/>
+              <a:t> </a:t>
+            </a:r>
+            <a:r>
+              <a:rPr dirty="0" err="1"/>
+              <a:t>হয়</a:t>
+            </a:r>
+            <a:r>
+              <a:rPr dirty="0"/>
+              <a:t> </a:t>
+            </a:r>
+            <a:r>
+              <a:rPr dirty="0" err="1"/>
+              <a:t>এবং</a:t>
+            </a:r>
+            <a:r>
+              <a:rPr dirty="0"/>
+              <a:t> </a:t>
+            </a:r>
+            <a:r>
+              <a:rPr dirty="0" err="1"/>
+              <a:t>স্লিপ</a:t>
+            </a:r>
+            <a:r>
+              <a:rPr dirty="0"/>
+              <a:t> </a:t>
+            </a:r>
+            <a:r>
+              <a:rPr dirty="0" err="1"/>
+              <a:t>প্রিন্ট</a:t>
+            </a:r>
+            <a:r>
+              <a:rPr dirty="0"/>
+              <a:t> </a:t>
+            </a:r>
+            <a:r>
+              <a:rPr dirty="0" err="1"/>
+              <a:t>হয়ে</a:t>
+            </a:r>
+            <a:r>
+              <a:rPr dirty="0"/>
+              <a:t> </a:t>
+            </a:r>
+            <a:r>
+              <a:rPr dirty="0" err="1"/>
+              <a:t>যায়</a:t>
+            </a:r>
+            <a:r>
+              <a:rPr dirty="0"/>
+              <a:t>।</a:t>
             </a:r>
           </a:p>
           <a:p>
@@ -8526,7 +9570,32 @@
               </a:defRPr>
             </a:pPr>
             <a:r>
-              <a:t>📋 আজকের প্যাসেঞ্জার ম্যানিফেস্ট (Passenger Manifest)</a:t>
+              <a:rPr dirty="0"/>
+              <a:t>📋 </a:t>
+            </a:r>
+            <a:r>
+              <a:rPr dirty="0" err="1"/>
+              <a:t>আজকের</a:t>
+            </a:r>
+            <a:r>
+              <a:rPr dirty="0"/>
+              <a:t> </a:t>
+            </a:r>
+            <a:r>
+              <a:rPr dirty="0" err="1"/>
+              <a:t>প্যাসেঞ্জার</a:t>
+            </a:r>
+            <a:r>
+              <a:rPr dirty="0"/>
+              <a:t> </a:t>
+            </a:r>
+            <a:r>
+              <a:rPr dirty="0" err="1"/>
+              <a:t>ম্যানিফেস্ট</a:t>
+            </a:r>
+            <a:r>
+              <a:rPr dirty="0"/>
+              <a:t> (Passenger Manifest)</a:t>
             </a:r>
           </a:p>
           <a:p>
@@ -8541,7 +9610,124 @@
               </a:defRPr>
             </a:pPr>
             <a:r>
-              <a:t>বাস ছাড়ার আগে সব যাত্রীর নাম ও ফোনের তালিকা নিয়ে সুপারভাইজার সহজেই বোর্ডিং সম্পন্ন করতে পারেন।</a:t>
+              <a:rPr dirty="0" err="1"/>
+              <a:t>বাস</a:t>
+            </a:r>
+            <a:r>
+              <a:rPr dirty="0"/>
+              <a:t> </a:t>
+            </a:r>
+            <a:r>
+              <a:rPr dirty="0" err="1"/>
+              <a:t>ছাড়ার</a:t>
+            </a:r>
+            <a:r>
+              <a:rPr dirty="0"/>
+              <a:t> </a:t>
+            </a:r>
+            <a:r>
+              <a:rPr dirty="0" err="1"/>
+              <a:t>আগে</a:t>
+            </a:r>
+            <a:r>
+              <a:rPr dirty="0"/>
+              <a:t> </a:t>
+            </a:r>
+            <a:r>
+              <a:rPr dirty="0" err="1"/>
+              <a:t>সব</a:t>
+            </a:r>
+            <a:r>
+              <a:rPr dirty="0"/>
+              <a:t> </a:t>
+            </a:r>
+            <a:r>
+              <a:rPr dirty="0" err="1"/>
+              <a:t>যাত্রীর</a:t>
+            </a:r>
+            <a:r>
+              <a:rPr dirty="0"/>
+              <a:t> </a:t>
+            </a:r>
+            <a:r>
+              <a:rPr dirty="0" err="1"/>
+              <a:t>নাম</a:t>
+            </a:r>
+            <a:r>
+              <a:rPr dirty="0"/>
+              <a:t> ও </a:t>
+            </a:r>
+            <a:r>
+              <a:rPr dirty="0" err="1"/>
+              <a:t>ফোনের</a:t>
+            </a:r>
+            <a:r>
+              <a:rPr dirty="0"/>
+              <a:t> </a:t>
+            </a:r>
+            <a:r>
+              <a:rPr dirty="0" err="1"/>
+              <a:t>তালিকা</a:t>
+            </a:r>
+            <a:r>
+              <a:rPr dirty="0"/>
+              <a:t> </a:t>
+            </a:r>
+            <a:r>
+              <a:rPr dirty="0" err="1"/>
+              <a:t>নিয়ে</a:t>
+            </a:r>
+            <a:r>
+              <a:rPr dirty="0"/>
+              <a:t> </a:t>
+            </a:r>
+            <a:r>
+              <a:rPr dirty="0" err="1"/>
+              <a:t>সুপারভাইজার</a:t>
+            </a:r>
+            <a:r>
+              <a:rPr dirty="0"/>
+              <a:t> </a:t>
+            </a:r>
+            <a:r>
+              <a:rPr dirty="0" err="1"/>
+              <a:t>সহজেই</a:t>
+            </a:r>
+            <a:r>
+              <a:rPr dirty="0"/>
+              <a:t> </a:t>
+            </a:r>
+            <a:r>
+              <a:rPr dirty="0" err="1"/>
+              <a:t>বোর্ডিং</a:t>
+            </a:r>
+            <a:r>
+              <a:rPr dirty="0"/>
+              <a:t> </a:t>
+            </a:r>
+            <a:r>
+              <a:rPr dirty="0" err="1"/>
+              <a:t>সম্পন্ন</a:t>
+            </a:r>
+            <a:r>
+              <a:rPr dirty="0"/>
+              <a:t> </a:t>
+            </a:r>
+            <a:r>
+              <a:rPr dirty="0" err="1"/>
+              <a:t>করতে</a:t>
+            </a:r>
+            <a:r>
+              <a:rPr dirty="0"/>
+              <a:t> </a:t>
+            </a:r>
+            <a:r>
+              <a:rPr dirty="0" err="1"/>
+              <a:t>পারেন</a:t>
+            </a:r>
+            <a:r>
+              <a:rPr dirty="0"/>
+              <a:t>।</a:t>
             </a:r>
           </a:p>
           <a:p>
@@ -8556,8 +9742,30 @@
               </a:defRPr>
             </a:pPr>
             <a:r>
-              <a:t>🔒 নির্ভরযোগ্য অডিট ট্রেইল</a:t>
-            </a:r>
+              <a:rPr dirty="0"/>
+              <a:t>🔒 </a:t>
+            </a:r>
+            <a:r>
+              <a:rPr dirty="0" err="1"/>
+              <a:t>নির্ভরযোগ্য</a:t>
+            </a:r>
+            <a:r>
+              <a:rPr dirty="0"/>
+              <a:t> </a:t>
+            </a:r>
+            <a:r>
+              <a:rPr dirty="0" err="1"/>
+              <a:t>অডিট</a:t>
+            </a:r>
+            <a:r>
+              <a:rPr dirty="0"/>
+              <a:t> </a:t>
+            </a:r>
+            <a:r>
+              <a:rPr dirty="0" err="1"/>
+              <a:t>ট্রেইল</a:t>
+            </a:r>
+            <a:endParaRPr dirty="0"/>
           </a:p>
           <a:p>
             <a:pPr>
@@ -8571,7 +9779,136 @@
               </a:defRPr>
             </a:pPr>
             <a:r>
-              <a:t>১০টি কাউন্টার থেকে কয়টি টিকেট ইস্যু হলো এবং কত টাকা আদায় হলো তা সাথে সাথে সংরক্ষিত থাকে।</a:t>
+              <a:rPr dirty="0"/>
+              <a:t>১০টি </a:t>
+            </a:r>
+            <a:r>
+              <a:rPr dirty="0" err="1"/>
+              <a:t>কাউন্টার</a:t>
+            </a:r>
+            <a:r>
+              <a:rPr dirty="0"/>
+              <a:t> </a:t>
+            </a:r>
+            <a:r>
+              <a:rPr dirty="0" err="1"/>
+              <a:t>থেকে</a:t>
+            </a:r>
+            <a:r>
+              <a:rPr dirty="0"/>
+              <a:t> </a:t>
+            </a:r>
+            <a:r>
+              <a:rPr dirty="0" err="1"/>
+              <a:t>কয়টি</a:t>
+            </a:r>
+            <a:r>
+              <a:rPr dirty="0"/>
+              <a:t> </a:t>
+            </a:r>
+            <a:r>
+              <a:rPr dirty="0" err="1"/>
+              <a:t>টিকেট</a:t>
+            </a:r>
+            <a:r>
+              <a:rPr dirty="0"/>
+              <a:t> </a:t>
+            </a:r>
+            <a:r>
+              <a:rPr dirty="0" err="1"/>
+              <a:t>ইস্যু</a:t>
+            </a:r>
+            <a:r>
+              <a:rPr dirty="0"/>
+              <a:t> </a:t>
+            </a:r>
+            <a:r>
+              <a:rPr dirty="0" err="1"/>
+              <a:t>হলো</a:t>
+            </a:r>
+            <a:r>
+              <a:rPr dirty="0"/>
+              <a:t> </a:t>
+            </a:r>
+            <a:r>
+              <a:rPr dirty="0" err="1"/>
+              <a:t>এবং</a:t>
+            </a:r>
+            <a:r>
+              <a:rPr dirty="0"/>
+              <a:t> </a:t>
+            </a:r>
+            <a:r>
+              <a:rPr dirty="0" err="1"/>
+              <a:t>কত</a:t>
+            </a:r>
+            <a:r>
+              <a:rPr dirty="0"/>
+              <a:t> </a:t>
+            </a:r>
+            <a:r>
+              <a:rPr dirty="0" err="1"/>
+              <a:t>টাকা</a:t>
+            </a:r>
+            <a:r>
+              <a:rPr dirty="0"/>
+              <a:t> </a:t>
+            </a:r>
+            <a:r>
+              <a:rPr dirty="0" err="1"/>
+              <a:t>আদায়</a:t>
+            </a:r>
+            <a:r>
+              <a:rPr dirty="0"/>
+              <a:t> </a:t>
+            </a:r>
+            <a:r>
+              <a:rPr dirty="0" err="1"/>
+              <a:t>হলো</a:t>
+            </a:r>
+            <a:r>
+              <a:rPr dirty="0"/>
+              <a:t> </a:t>
+            </a:r>
+            <a:r>
+              <a:rPr dirty="0" err="1"/>
+              <a:t>তা</a:t>
+            </a:r>
+            <a:r>
+              <a:rPr dirty="0"/>
+              <a:t> </a:t>
+            </a:r>
+            <a:r>
+              <a:rPr dirty="0" err="1"/>
+              <a:t>সাথে</a:t>
+            </a:r>
+            <a:r>
+              <a:rPr dirty="0"/>
+              <a:t> </a:t>
+            </a:r>
+            <a:r>
+              <a:rPr dirty="0" err="1"/>
+              <a:t>সাথে</a:t>
+            </a:r>
+            <a:r>
+              <a:rPr dirty="0"/>
+              <a:t> </a:t>
+            </a:r>
+            <a:r>
+              <a:rPr dirty="0" err="1"/>
+              <a:t>সংরক্ষিত</a:t>
+            </a:r>
+            <a:r>
+              <a:rPr dirty="0"/>
+              <a:t> </a:t>
+            </a:r>
+            <a:r>
+              <a:rPr dirty="0" err="1"/>
+              <a:t>থাকে</a:t>
+            </a:r>
+            <a:r>
+              <a:rPr dirty="0"/>
+              <a:t>।</a:t>
             </a:r>
           </a:p>
         </p:txBody>
@@ -8585,7 +9922,7 @@
 </file>
 
 <file path=ppt/slides/slide9.xml><?xml version="1.0" encoding="utf-8"?>
-<p:sld xmlns:a="http://schemas.openxmlformats.org/drawingml/2006/main" xmlns:p="http://schemas.openxmlformats.org/presentationml/2006/main" xmlns:r="http://schemas.openxmlformats.org/officeDocument/2006/relationships">
+<p:sld xmlns:a="http://schemas.openxmlformats.org/drawingml/2006/main" xmlns:r="http://schemas.openxmlformats.org/officeDocument/2006/relationships" xmlns:p="http://schemas.openxmlformats.org/presentationml/2006/main">
   <p:cSld>
     <p:spTree>
       <p:nvGrpSpPr>
@@ -8593,7 +9930,14 @@
         <p:cNvGrpSpPr/>
         <p:nvPr/>
       </p:nvGrpSpPr>
-      <p:grpSpPr/>
+      <p:grpSpPr>
+        <a:xfrm>
+          <a:off x="0" y="0"/>
+          <a:ext cx="0" cy="0"/>
+          <a:chOff x="0" y="0"/>
+          <a:chExt cx="0" cy="0"/>
+        </a:xfrm>
+      </p:grpSpPr>
       <p:sp>
         <p:nvSpPr>
           <p:cNvPr id="2" name="Rectangle 1"/>
@@ -8609,7 +9953,7 @@
             <a:avLst/>
           </a:prstGeom>
           <a:solidFill>
-            <a:srgbClr val="0F172A"/>
+            <a:srgbClr val="F8FAFC"/>
           </a:solidFill>
           <a:ln>
             <a:noFill/>
@@ -8634,6 +9978,7 @@
           <a:lstStyle/>
           <a:p>
             <a:pPr algn="ctr"/>
+            <a:endParaRPr/>
           </a:p>
         </p:txBody>
       </p:sp>
@@ -8662,12 +10007,12 @@
             <a:pPr>
               <a:defRPr sz="1000" b="1">
                 <a:solidFill>
-                  <a:srgbClr val="10B981"/>
-                </a:solidFill>
-              </a:defRPr>
-            </a:pPr>
-            <a:r>
-              <a:t>EXECUTIVE SUMMARY</a:t>
+                  <a:srgbClr val="4F46E5"/>
+                </a:solidFill>
+              </a:defRPr>
+            </a:pPr>
+            <a:r>
+              <a:t>FINANCIAL MANAGEMENT</a:t>
             </a:r>
           </a:p>
           <a:p>
@@ -8677,73 +10022,52 @@
               </a:spcAft>
               <a:defRPr sz="2200" b="1">
                 <a:solidFill>
-                  <a:srgbClr val="FFFFFF"/>
-                </a:solidFill>
-              </a:defRPr>
-            </a:pPr>
-            <a:r>
-              <a:t>সিস্টেমের প্রযুক্তিগত উৎকর্ষ ও ব্যবসায়িক সুবিধাসমূহ</a:t>
+                  <a:srgbClr val="0F172A"/>
+                </a:solidFill>
+              </a:defRPr>
+            </a:pPr>
+            <a:r>
+              <a:t>কোম্পানি আয়-ব্যয় অডিট ও কাউন্টার ক্যাশবুক মডিউল</a:t>
             </a:r>
           </a:p>
           <a:p>
             <a:pPr>
               <a:defRPr sz="1100">
                 <a:solidFill>
-                  <a:srgbClr val="94A3B8"/>
-                </a:solidFill>
-              </a:defRPr>
-            </a:pPr>
-            <a:r>
-              <a:t>বাস ফ্লিট পরিচালনায় ১০০% আধুনিকীকরণ, স্বচ্ছতা এবং আয়ের সর্বোচ্চ সুরক্ষা</a:t>
-            </a:r>
-          </a:p>
-        </p:txBody>
-      </p:sp>
-      <p:sp>
-        <p:nvSpPr>
-          <p:cNvPr id="4" name="Rounded Rectangle 3"/>
-          <p:cNvSpPr/>
+                  <a:srgbClr val="64748B"/>
+                </a:solidFill>
+              </a:defRPr>
+            </a:pPr>
+            <a:r>
+              <a:t>১০টি কাউন্টার ও হেডকোয়ার্টারের টিকেট সেলস, ফুয়েল স্লিপ, টোল ও অপারেটিং খরচের লাইভ অডিট</a:t>
+            </a:r>
+          </a:p>
+        </p:txBody>
+      </p:sp>
+      <p:pic>
+        <p:nvPicPr>
+          <p:cNvPr id="4" name="Picture 3" descr="09_admin_finance_audit.png"/>
+          <p:cNvPicPr>
+            <a:picLocks noChangeAspect="1"/>
+          </p:cNvPicPr>
           <p:nvPr/>
-        </p:nvSpPr>
-        <p:spPr>
-          <a:xfrm>
-            <a:off x="731520" y="1737360"/>
-            <a:ext cx="5120640" cy="1828800"/>
-          </a:xfrm>
-          <a:prstGeom prst="roundRect">
+        </p:nvPicPr>
+        <p:blipFill>
+          <a:blip r:embed="rId2"/>
+          <a:stretch>
+            <a:fillRect/>
+          </a:stretch>
+        </p:blipFill>
+        <p:spPr>
+          <a:xfrm>
+            <a:off x="731520" y="1645920"/>
+            <a:ext cx="6675120" cy="4171950"/>
+          </a:xfrm>
+          <a:prstGeom prst="rect">
             <a:avLst/>
           </a:prstGeom>
-          <a:solidFill>
-            <a:srgbClr val="1E293B"/>
-          </a:solidFill>
-          <a:ln>
-            <a:solidFill>
-              <a:srgbClr val="334155"/>
-            </a:solidFill>
-          </a:ln>
-        </p:spPr>
-        <p:style>
-          <a:lnRef idx="1">
-            <a:schemeClr val="accent1"/>
-          </a:lnRef>
-          <a:fillRef idx="3">
-            <a:schemeClr val="accent1"/>
-          </a:fillRef>
-          <a:effectRef idx="2">
-            <a:schemeClr val="accent1"/>
-          </a:effectRef>
-          <a:fontRef idx="minor">
-            <a:schemeClr val="lt1"/>
-          </a:fontRef>
-        </p:style>
-        <p:txBody>
-          <a:bodyPr rtlCol="0" anchor="ctr"/>
-          <a:lstStyle/>
-          <a:p>
-            <a:pPr algn="ctr"/>
-          </a:p>
-        </p:txBody>
-      </p:sp>
+        </p:spPr>
+      </p:pic>
       <p:sp>
         <p:nvSpPr>
           <p:cNvPr id="5" name="TextBox 4"/>
@@ -8752,8 +10076,8 @@
         </p:nvSpPr>
         <p:spPr>
           <a:xfrm>
-            <a:off x="1005840" y="1965960"/>
-            <a:ext cx="4572000" cy="1371600"/>
+            <a:off x="7680960" y="1645920"/>
+            <a:ext cx="3749039" cy="4572000"/>
           </a:xfrm>
           <a:prstGeom prst="rect">
             <a:avLst/>
@@ -8768,114 +10092,31 @@
           <a:p>
             <a:pPr>
               <a:spcAft>
-                <a:spcPts val="600"/>
-              </a:spcAft>
-              <a:defRPr sz="1400" b="1">
-                <a:solidFill>
-                  <a:srgbClr val="FFFFFF"/>
-                </a:solidFill>
-              </a:defRPr>
-            </a:pPr>
-            <a:r>
-              <a:t>🚀 সেন্ট্রাল হেডকোয়ার্টার ভিজিবিলিটি</a:t>
-            </a:r>
-          </a:p>
-          <a:p>
-            <a:pPr>
-              <a:spcAft>
                 <a:spcPts val="200"/>
               </a:spcAft>
-              <a:defRPr sz="1100">
-                <a:solidFill>
-                  <a:srgbClr val="94A3B8"/>
-                </a:solidFill>
-              </a:defRPr>
-            </a:pPr>
-            <a:r>
-              <a:t>প্রধান অ্যাডমিন অফিসে বসেই ১০টি টার্মিনালের সকল বাসের অবস্থান ও খালি সিটের রিয়েল-টাইম তথ্য পাচ্ছেন।</a:t>
-            </a:r>
-          </a:p>
-        </p:txBody>
-      </p:sp>
-      <p:sp>
-        <p:nvSpPr>
-          <p:cNvPr id="6" name="Rounded Rectangle 5"/>
-          <p:cNvSpPr/>
-          <p:nvPr/>
-        </p:nvSpPr>
-        <p:spPr>
-          <a:xfrm>
-            <a:off x="6126480" y="1737360"/>
-            <a:ext cx="5120640" cy="1828800"/>
-          </a:xfrm>
-          <a:prstGeom prst="roundRect">
-            <a:avLst/>
-          </a:prstGeom>
-          <a:solidFill>
-            <a:srgbClr val="1E293B"/>
-          </a:solidFill>
-          <a:ln>
-            <a:solidFill>
-              <a:srgbClr val="334155"/>
-            </a:solidFill>
-          </a:ln>
-        </p:spPr>
-        <p:style>
-          <a:lnRef idx="1">
-            <a:schemeClr val="accent1"/>
-          </a:lnRef>
-          <a:fillRef idx="3">
-            <a:schemeClr val="accent1"/>
-          </a:fillRef>
-          <a:effectRef idx="2">
-            <a:schemeClr val="accent1"/>
-          </a:effectRef>
-          <a:fontRef idx="minor">
-            <a:schemeClr val="lt1"/>
-          </a:fontRef>
-        </p:style>
-        <p:txBody>
-          <a:bodyPr rtlCol="0" anchor="ctr"/>
-          <a:lstStyle/>
-          <a:p>
-            <a:pPr algn="ctr"/>
-          </a:p>
-        </p:txBody>
-      </p:sp>
-      <p:sp>
-        <p:nvSpPr>
-          <p:cNvPr id="7" name="TextBox 6"/>
-          <p:cNvSpPr txBox="1"/>
-          <p:nvPr/>
-        </p:nvSpPr>
-        <p:spPr>
-          <a:xfrm>
-            <a:off x="6400800" y="1965960"/>
-            <a:ext cx="4572000" cy="1371600"/>
-          </a:xfrm>
-          <a:prstGeom prst="rect">
-            <a:avLst/>
-          </a:prstGeom>
-          <a:noFill/>
-        </p:spPr>
-        <p:txBody>
-          <a:bodyPr wrap="square">
-            <a:spAutoFit/>
-          </a:bodyPr>
-          <a:lstStyle/>
-          <a:p>
-            <a:pPr>
-              <a:spcAft>
-                <a:spcPts val="600"/>
-              </a:spcAft>
-              <a:defRPr sz="1400" b="1">
-                <a:solidFill>
-                  <a:srgbClr val="FFFFFF"/>
-                </a:solidFill>
-              </a:defRPr>
-            </a:pPr>
-            <a:r>
-              <a:t>⚡ টার্মিনালগুলোর বিকেন্দ্রীভূত স্বাধীনতা</a:t>
+              <a:defRPr sz="1150" b="1">
+                <a:solidFill>
+                  <a:srgbClr val="0F172A"/>
+                </a:solidFill>
+              </a:defRPr>
+            </a:pPr>
+            <a:r>
+              <a:t>💰 রিয়েল-টাইম আয়-ব্যয় ও প্রফিট মার্জিন</a:t>
+            </a:r>
+          </a:p>
+          <a:p>
+            <a:pPr>
+              <a:spcAft>
+                <a:spcPts val="800"/>
+              </a:spcAft>
+              <a:defRPr sz="1000">
+                <a:solidFill>
+                  <a:srgbClr val="64748B"/>
+                </a:solidFill>
+              </a:defRPr>
+            </a:pPr>
+            <a:r>
+              <a:t>প্রধান কার্যালয় থেকে এক নজরে কোম্পানির মোট রাজস্ব আয়, মোট পরিচালন ব্যয় ও নীট প্রফিট মার্জিন (%) লাইভ মনিটরিং।</a:t>
             </a:r>
           </a:p>
           <a:p>
@@ -8883,97 +10124,29 @@
               <a:spcAft>
                 <a:spcPts val="200"/>
               </a:spcAft>
-              <a:defRPr sz="1100">
-                <a:solidFill>
-                  <a:srgbClr val="94A3B8"/>
-                </a:solidFill>
-              </a:defRPr>
-            </a:pPr>
-            <a:r>
-              <a:t>১০টি কাউন্টারের সেলস টিম স্বাধীনভাবে তাদের বাসের শিডিউল ম্যানেজ ও দ্রুত টিকেট বুকিং করতে পারছে।</a:t>
-            </a:r>
-          </a:p>
-        </p:txBody>
-      </p:sp>
-      <p:sp>
-        <p:nvSpPr>
-          <p:cNvPr id="8" name="Rounded Rectangle 7"/>
-          <p:cNvSpPr/>
-          <p:nvPr/>
-        </p:nvSpPr>
-        <p:spPr>
-          <a:xfrm>
-            <a:off x="731520" y="3840479"/>
-            <a:ext cx="5120640" cy="1828800"/>
-          </a:xfrm>
-          <a:prstGeom prst="roundRect">
-            <a:avLst/>
-          </a:prstGeom>
-          <a:solidFill>
-            <a:srgbClr val="1E293B"/>
-          </a:solidFill>
-          <a:ln>
-            <a:solidFill>
-              <a:srgbClr val="334155"/>
-            </a:solidFill>
-          </a:ln>
-        </p:spPr>
-        <p:style>
-          <a:lnRef idx="1">
-            <a:schemeClr val="accent1"/>
-          </a:lnRef>
-          <a:fillRef idx="3">
-            <a:schemeClr val="accent1"/>
-          </a:fillRef>
-          <a:effectRef idx="2">
-            <a:schemeClr val="accent1"/>
-          </a:effectRef>
-          <a:fontRef idx="minor">
-            <a:schemeClr val="lt1"/>
-          </a:fontRef>
-        </p:style>
-        <p:txBody>
-          <a:bodyPr rtlCol="0" anchor="ctr"/>
-          <a:lstStyle/>
-          <a:p>
-            <a:pPr algn="ctr"/>
-          </a:p>
-        </p:txBody>
-      </p:sp>
-      <p:sp>
-        <p:nvSpPr>
-          <p:cNvPr id="9" name="TextBox 8"/>
-          <p:cNvSpPr txBox="1"/>
-          <p:nvPr/>
-        </p:nvSpPr>
-        <p:spPr>
-          <a:xfrm>
-            <a:off x="1005840" y="4069079"/>
-            <a:ext cx="4572000" cy="1371600"/>
-          </a:xfrm>
-          <a:prstGeom prst="rect">
-            <a:avLst/>
-          </a:prstGeom>
-          <a:noFill/>
-        </p:spPr>
-        <p:txBody>
-          <a:bodyPr wrap="square">
-            <a:spAutoFit/>
-          </a:bodyPr>
-          <a:lstStyle/>
-          <a:p>
-            <a:pPr>
-              <a:spcAft>
-                <a:spcPts val="600"/>
-              </a:spcAft>
-              <a:defRPr sz="1400" b="1">
-                <a:solidFill>
-                  <a:srgbClr val="FFFFFF"/>
-                </a:solidFill>
-              </a:defRPr>
-            </a:pPr>
-            <a:r>
-              <a:t>💺 শতভাগ সিট অকুপেন্সি বৃদ্ধি</a:t>
+              <a:defRPr sz="1150" b="1">
+                <a:solidFill>
+                  <a:srgbClr val="0F172A"/>
+                </a:solidFill>
+              </a:defRPr>
+            </a:pPr>
+            <a:r>
+              <a:t>⛽ ফুয়েল স্লিপ ও সেতু টোল ট্র্যাকিং</a:t>
+            </a:r>
+          </a:p>
+          <a:p>
+            <a:pPr>
+              <a:spcAft>
+                <a:spcPts val="800"/>
+              </a:spcAft>
+              <a:defRPr sz="1000">
+                <a:solidFill>
+                  <a:srgbClr val="64748B"/>
+                </a:solidFill>
+              </a:defRPr>
+            </a:pPr>
+            <a:r>
+              <a:t>প্রতিটি বাসের মেঘনা/পদ্মা সেতু টোল, ফিলিং স্টেশনের ডিজেল বিল ও ড্রাইভার খোরাকি ভাউচার নম্বরসহ এন্ট্রি।</a:t>
             </a:r>
           </a:p>
           <a:p>
@@ -8981,97 +10154,29 @@
               <a:spcAft>
                 <a:spcPts val="200"/>
               </a:spcAft>
-              <a:defRPr sz="1100">
-                <a:solidFill>
-                  <a:srgbClr val="94A3B8"/>
-                </a:solidFill>
-              </a:defRPr>
-            </a:pPr>
-            <a:r>
-              <a:t>কোন বাসে সিট খালি আছে তা হেডকোয়ার্টার আগে থেকেই দেখতে পেয়ে দ্রুত সিদ্ধান্ত ও রুট রিশিডিউলিং করতে পারছে।</a:t>
-            </a:r>
-          </a:p>
-        </p:txBody>
-      </p:sp>
-      <p:sp>
-        <p:nvSpPr>
-          <p:cNvPr id="10" name="Rounded Rectangle 9"/>
-          <p:cNvSpPr/>
-          <p:nvPr/>
-        </p:nvSpPr>
-        <p:spPr>
-          <a:xfrm>
-            <a:off x="6126480" y="3840479"/>
-            <a:ext cx="5120640" cy="1828800"/>
-          </a:xfrm>
-          <a:prstGeom prst="roundRect">
-            <a:avLst/>
-          </a:prstGeom>
-          <a:solidFill>
-            <a:srgbClr val="1E293B"/>
-          </a:solidFill>
-          <a:ln>
-            <a:solidFill>
-              <a:srgbClr val="334155"/>
-            </a:solidFill>
-          </a:ln>
-        </p:spPr>
-        <p:style>
-          <a:lnRef idx="1">
-            <a:schemeClr val="accent1"/>
-          </a:lnRef>
-          <a:fillRef idx="3">
-            <a:schemeClr val="accent1"/>
-          </a:fillRef>
-          <a:effectRef idx="2">
-            <a:schemeClr val="accent1"/>
-          </a:effectRef>
-          <a:fontRef idx="minor">
-            <a:schemeClr val="lt1"/>
-          </a:fontRef>
-        </p:style>
-        <p:txBody>
-          <a:bodyPr rtlCol="0" anchor="ctr"/>
-          <a:lstStyle/>
-          <a:p>
-            <a:pPr algn="ctr"/>
-          </a:p>
-        </p:txBody>
-      </p:sp>
-      <p:sp>
-        <p:nvSpPr>
-          <p:cNvPr id="11" name="TextBox 10"/>
-          <p:cNvSpPr txBox="1"/>
-          <p:nvPr/>
-        </p:nvSpPr>
-        <p:spPr>
-          <a:xfrm>
-            <a:off x="6400800" y="4069079"/>
-            <a:ext cx="4572000" cy="1371600"/>
-          </a:xfrm>
-          <a:prstGeom prst="rect">
-            <a:avLst/>
-          </a:prstGeom>
-          <a:noFill/>
-        </p:spPr>
-        <p:txBody>
-          <a:bodyPr wrap="square">
-            <a:spAutoFit/>
-          </a:bodyPr>
-          <a:lstStyle/>
-          <a:p>
-            <a:pPr>
-              <a:spcAft>
-                <a:spcPts val="600"/>
-              </a:spcAft>
-              <a:defRPr sz="1400" b="1">
-                <a:solidFill>
-                  <a:srgbClr val="FFFFFF"/>
-                </a:solidFill>
-              </a:defRPr>
-            </a:pPr>
-            <a:r>
-              <a:t>💻 জিরো সার্ভার ওভারহেড ও দ্রুত গতি</a:t>
+              <a:defRPr sz="1150" b="1">
+                <a:solidFill>
+                  <a:srgbClr val="0F172A"/>
+                </a:solidFill>
+              </a:defRPr>
+            </a:pPr>
+            <a:r>
+              <a:t>📦 পার্সেল ও চার্টার রিজার্ভ ইনকাম</a:t>
+            </a:r>
+          </a:p>
+          <a:p>
+            <a:pPr>
+              <a:spcAft>
+                <a:spcPts val="800"/>
+              </a:spcAft>
+              <a:defRPr sz="1000">
+                <a:solidFill>
+                  <a:srgbClr val="64748B"/>
+                </a:solidFill>
+              </a:defRPr>
+            </a:pPr>
+            <a:r>
+              <a:t>যাত্রী টিকেট ছাড়াও কুরিয়ার কার্গো এবং স্পেশাল বাস রিজার্ভেশনের অতিরিক্ত আয় স্বয়ংক্রিয়ভাবে ব্যালেন্সে যুক্ত।</a:t>
             </a:r>
           </a:p>
           <a:p>
@@ -9079,14 +10184,59 @@
               <a:spcAft>
                 <a:spcPts val="200"/>
               </a:spcAft>
-              <a:defRPr sz="1100">
-                <a:solidFill>
-                  <a:srgbClr val="94A3B8"/>
-                </a:solidFill>
-              </a:defRPr>
-            </a:pPr>
-            <a:r>
-              <a:t>Tailwind CSS ও আধুনিক ব্রাউজার-ফার্স্ট আর্কিটেকচারে তৈরি, কোনো জটিল ব্যাকএন্ড ছাড়াও অত্যন্ত দ্রুতগতিতে কাজ করে।</a:t>
+              <a:defRPr sz="1150" b="1">
+                <a:solidFill>
+                  <a:srgbClr val="0F172A"/>
+                </a:solidFill>
+              </a:defRPr>
+            </a:pPr>
+            <a:r>
+              <a:t>🏦 কাউন্টার দৈনিক ক্যাশবুক (Cash in Hand)</a:t>
+            </a:r>
+          </a:p>
+          <a:p>
+            <a:pPr>
+              <a:spcAft>
+                <a:spcPts val="800"/>
+              </a:spcAft>
+              <a:defRPr sz="1000">
+                <a:solidFill>
+                  <a:srgbClr val="64748B"/>
+                </a:solidFill>
+              </a:defRPr>
+            </a:pPr>
+            <a:r>
+              <a:t>১০টি কাউন্টারের ক্যাশবাক্সে কত টাকা জমা হলো এবং দিনশেষে হেডকোয়ার্টারে কত জমা হবে তার স্বচ্ছ হিসাব।</a:t>
+            </a:r>
+          </a:p>
+          <a:p>
+            <a:pPr>
+              <a:spcAft>
+                <a:spcPts val="200"/>
+              </a:spcAft>
+              <a:defRPr sz="1150" b="1">
+                <a:solidFill>
+                  <a:srgbClr val="0F172A"/>
+                </a:solidFill>
+              </a:defRPr>
+            </a:pPr>
+            <a:r>
+              <a:t>🖨️ অডিট লেজার ফিল্টার ও প্রিন্ট</a:t>
+            </a:r>
+          </a:p>
+          <a:p>
+            <a:pPr>
+              <a:spcAft>
+                <a:spcPts val="800"/>
+              </a:spcAft>
+              <a:defRPr sz="1000">
+                <a:solidFill>
+                  <a:srgbClr val="64748B"/>
+                </a:solidFill>
+              </a:defRPr>
+            </a:pPr>
+            <a:r>
+              <a:t>কাউন্টার, ভাউচার বা ক্যাটাগরি অনুযায়ী যেকোনো খরচের পূর্ণাঙ্গ হিসেব ফিল্টার ও ১-ক্লিকে প্রিন্ট সুবিধা।</a:t>
             </a:r>
           </a:p>
         </p:txBody>
